--- a/05-Analyze data in a lake database.pptx
+++ b/05-Analyze data in a lake database.pptx
@@ -5,17 +5,21 @@
     <p:sldMasterId id="2147483648" r:id="rId1"/>
   </p:sldMasterIdLst>
   <p:notesMasterIdLst>
-    <p:notesMasterId r:id="rId7"/>
+    <p:notesMasterId r:id="rId11"/>
   </p:notesMasterIdLst>
   <p:handoutMasterIdLst>
-    <p:handoutMasterId r:id="rId8"/>
+    <p:handoutMasterId r:id="rId12"/>
   </p:handoutMasterIdLst>
   <p:sldIdLst>
     <p:sldId id="256" r:id="rId2"/>
     <p:sldId id="258" r:id="rId3"/>
     <p:sldId id="423" r:id="rId4"/>
-    <p:sldId id="424" r:id="rId5"/>
-    <p:sldId id="2134804631" r:id="rId6"/>
+    <p:sldId id="1792" r:id="rId5"/>
+    <p:sldId id="2134805596" r:id="rId6"/>
+    <p:sldId id="2134805597" r:id="rId7"/>
+    <p:sldId id="2134805599" r:id="rId8"/>
+    <p:sldId id="424" r:id="rId9"/>
+    <p:sldId id="2134804631" r:id="rId10"/>
   </p:sldIdLst>
   <p:sldSz cx="12192000" cy="6858000"/>
   <p:notesSz cx="6858000" cy="9144000"/>
@@ -1063,7 +1067,7 @@
           <a:p>
             <a:fld id="{2B56BDA5-FBCC-43E1-957B-02AF36889AD5}" type="datetimeFigureOut">
               <a:rPr lang="en-US" smtClean="0"/>
-              <a:t>12/4/2023</a:t>
+              <a:t>9/7/2024</a:t>
             </a:fld>
             <a:endParaRPr lang="en-US" dirty="0"/>
           </a:p>
@@ -1240,7 +1244,7 @@
           <a:p>
             <a:fld id="{8F44CDF0-0D54-4AFE-B409-D6358A9BB9A1}" type="datetimeFigureOut">
               <a:rPr lang="en-US" smtClean="0"/>
-              <a:t>12/4/2023</a:t>
+              <a:t>9/7/2024</a:t>
             </a:fld>
             <a:endParaRPr lang="en-US" dirty="0"/>
           </a:p>
@@ -1906,113 +1910,21 @@
           <a:bodyPr/>
           <a:lstStyle/>
           <a:p>
-            <a:pPr algn="l" rtl="0" fontAlgn="base"/>
-            <a:r>
-              <a:rPr lang="en-US" sz="1200" b="1" i="0" u="none" strike="noStrike" dirty="0">
-                <a:solidFill>
-                  <a:srgbClr val="000000"/>
-                </a:solidFill>
-                <a:effectLst/>
-                <a:latin typeface="Helvetica Neue"/>
-              </a:rPr>
-              <a:t>TALKING POINTS</a:t>
-            </a:r>
-            <a:r>
-              <a:rPr lang="en-US" sz="1200" b="0" i="0" dirty="0">
-                <a:effectLst/>
-                <a:latin typeface="Helvetica Neue"/>
-              </a:rPr>
-              <a:t>​</a:t>
-            </a:r>
-            <a:endParaRPr lang="en-US" b="0" i="0" dirty="0">
-              <a:effectLst/>
-            </a:endParaRPr>
-          </a:p>
-          <a:p>
-            <a:pPr algn="l" rtl="0" fontAlgn="base"/>
-            <a:r>
-              <a:rPr lang="en-US" sz="1200" b="0" i="0" dirty="0">
-                <a:effectLst/>
-                <a:latin typeface="Helvetica Neue"/>
-              </a:rPr>
-              <a:t>​</a:t>
-            </a:r>
-            <a:endParaRPr lang="en-US" b="0" i="0" dirty="0">
-              <a:effectLst/>
-            </a:endParaRPr>
-          </a:p>
-          <a:p>
-            <a:pPr algn="l" rtl="0" fontAlgn="base"/>
-            <a:r>
-              <a:rPr lang="en-US" sz="1200" b="0" i="0" u="none" strike="noStrike" dirty="0">
-                <a:solidFill>
-                  <a:srgbClr val="000000"/>
-                </a:solidFill>
-                <a:effectLst/>
-                <a:latin typeface="Helvetica Neue"/>
-              </a:rPr>
-              <a:t>Let’s put this into reality and show you how it works.</a:t>
-            </a:r>
-            <a:r>
-              <a:rPr lang="en-US" sz="1200" b="0" i="0" dirty="0">
-                <a:effectLst/>
-                <a:latin typeface="Helvetica Neue"/>
-              </a:rPr>
-              <a:t>​</a:t>
-            </a:r>
-            <a:endParaRPr lang="en-US" b="0" i="0" dirty="0">
-              <a:effectLst/>
-            </a:endParaRPr>
-          </a:p>
-          <a:p>
-            <a:pPr algn="l" rtl="0" fontAlgn="base"/>
-            <a:r>
-              <a:rPr lang="en-US" sz="1200" b="0" i="0" dirty="0">
-                <a:effectLst/>
-                <a:latin typeface="Helvetica Neue"/>
-              </a:rPr>
-              <a:t>​</a:t>
-            </a:r>
-            <a:endParaRPr lang="en-US" b="0" i="0" dirty="0">
-              <a:effectLst/>
-            </a:endParaRPr>
-          </a:p>
-          <a:p>
-            <a:pPr algn="l" rtl="0" fontAlgn="base"/>
-            <a:r>
-              <a:rPr lang="en-US" sz="1200" b="0" i="0" u="none" strike="noStrike" dirty="0">
-                <a:solidFill>
-                  <a:srgbClr val="000000"/>
-                </a:solidFill>
-                <a:effectLst/>
-                <a:latin typeface="Helvetica Neue"/>
-              </a:rPr>
-              <a:t>All instructions and context are found in this repository</a:t>
-            </a:r>
-            <a:r>
-              <a:rPr lang="en-US" sz="1200" b="0" i="0" dirty="0">
-                <a:effectLst/>
-                <a:latin typeface="Helvetica Neue"/>
-              </a:rPr>
-              <a:t>​</a:t>
-            </a:r>
-            <a:endParaRPr lang="en-US" b="0" i="0" dirty="0">
-              <a:effectLst/>
-            </a:endParaRPr>
-          </a:p>
-          <a:p>
-            <a:endParaRPr lang="en-GB" dirty="0"/>
-          </a:p>
-        </p:txBody>
-      </p:sp>
-      <p:sp>
-        <p:nvSpPr>
-          <p:cNvPr id="4" name="Slide Number Placeholder 3"/>
-          <p:cNvSpPr>
-            <a:spLocks noGrp="1"/>
-          </p:cNvSpPr>
-          <p:nvPr>
-            <p:ph type="sldNum" sz="quarter" idx="5"/>
+            <a:r>
+              <a:rPr lang="en-US" i="1" dirty="0"/>
+              <a:t>The concepts here build on the previously discussed concept of external tables. In effect, a lake database is a relational schema that abstracts data in files, so data in the database can be ingested and updated directly in the file system.</a:t>
+            </a:r>
+          </a:p>
+        </p:txBody>
+      </p:sp>
+      <p:sp>
+        <p:nvSpPr>
+          <p:cNvPr id="4" name="Header Placeholder 3"/>
+          <p:cNvSpPr>
+            <a:spLocks noGrp="1"/>
+          </p:cNvSpPr>
+          <p:nvPr>
+            <p:ph type="hdr" sz="quarter"/>
           </p:nvPr>
         </p:nvSpPr>
         <p:spPr/>
@@ -2020,8 +1932,82 @@
           <a:bodyPr/>
           <a:lstStyle/>
           <a:p>
-            <a:fld id="{37E24C93-78CA-4AF0-9E77-825D60ABA46D}" type="slidenum">
+            <a:endParaRPr lang="en-US" dirty="0"/>
+          </a:p>
+        </p:txBody>
+      </p:sp>
+      <p:sp>
+        <p:nvSpPr>
+          <p:cNvPr id="5" name="Footer Placeholder 4"/>
+          <p:cNvSpPr>
+            <a:spLocks noGrp="1"/>
+          </p:cNvSpPr>
+          <p:nvPr>
+            <p:ph type="ftr" sz="quarter" idx="4"/>
+          </p:nvPr>
+        </p:nvSpPr>
+        <p:spPr/>
+        <p:txBody>
+          <a:bodyPr/>
+          <a:lstStyle/>
+          <a:p>
+            <a:pPr defTabSz="914099" eaLnBrk="0" hangingPunct="0"/>
+            <a:r>
+              <a:rPr lang="en-US" sz="400">
+                <a:gradFill>
+                  <a:gsLst>
+                    <a:gs pos="0">
+                      <a:prstClr val="black"/>
+                    </a:gs>
+                    <a:gs pos="100000">
+                      <a:prstClr val="black"/>
+                    </a:gs>
+                  </a:gsLst>
+                  <a:lin ang="5400000" scaled="0"/>
+                </a:gradFill>
+                <a:latin typeface="Segoe UI" pitchFamily="34" charset="0"/>
+                <a:ea typeface="Segoe UI" pitchFamily="34" charset="0"/>
+                <a:cs typeface="Segoe UI" pitchFamily="34" charset="0"/>
+              </a:rPr>
+              <a:t>© Microsoft Corporation</a:t>
+            </a:r>
+            <a:endParaRPr lang="en-US" sz="400" dirty="0">
+              <a:gradFill>
+                <a:gsLst>
+                  <a:gs pos="0">
+                    <a:prstClr val="black"/>
+                  </a:gs>
+                  <a:gs pos="100000">
+                    <a:prstClr val="black"/>
+                  </a:gs>
+                </a:gsLst>
+                <a:lin ang="5400000" scaled="0"/>
+              </a:gradFill>
+              <a:latin typeface="Segoe UI" pitchFamily="34" charset="0"/>
+              <a:ea typeface="Segoe UI" pitchFamily="34" charset="0"/>
+              <a:cs typeface="Segoe UI" pitchFamily="34" charset="0"/>
+            </a:endParaRPr>
+          </a:p>
+        </p:txBody>
+      </p:sp>
+      <p:sp>
+        <p:nvSpPr>
+          <p:cNvPr id="6" name="Slide Number Placeholder 5"/>
+          <p:cNvSpPr>
+            <a:spLocks noGrp="1"/>
+          </p:cNvSpPr>
+          <p:nvPr>
+            <p:ph type="sldNum" sz="quarter" idx="5"/>
+          </p:nvPr>
+        </p:nvSpPr>
+        <p:spPr/>
+        <p:txBody>
+          <a:bodyPr/>
+          <a:lstStyle/>
+          <a:p>
+            <a:fld id="{B4008EB6-D09E-4580-8CD6-DDB14511944F}" type="slidenum">
               <a:rPr lang="en-US" smtClean="0"/>
+              <a:pPr/>
               <a:t>4</a:t>
             </a:fld>
             <a:endParaRPr lang="en-US" dirty="0"/>
@@ -2031,7 +2017,7 @@
     </p:spTree>
     <p:extLst>
       <p:ext uri="{BB962C8B-B14F-4D97-AF65-F5344CB8AC3E}">
-        <p14:creationId xmlns:p14="http://schemas.microsoft.com/office/powerpoint/2010/main" val="1674645597"/>
+        <p14:creationId xmlns:p14="http://schemas.microsoft.com/office/powerpoint/2010/main" val="993105508"/>
       </p:ext>
     </p:extLst>
   </p:cSld>
@@ -2085,18 +2071,21 @@
           <a:bodyPr/>
           <a:lstStyle/>
           <a:p>
-            <a:endParaRPr lang="en-US" dirty="0"/>
-          </a:p>
-        </p:txBody>
-      </p:sp>
-      <p:sp>
-        <p:nvSpPr>
-          <p:cNvPr id="4" name="Slide Number Placeholder 3"/>
-          <p:cNvSpPr>
-            <a:spLocks noGrp="1"/>
-          </p:cNvSpPr>
-          <p:nvPr>
-            <p:ph type="sldNum" sz="quarter" idx="5"/>
+            <a:r>
+              <a:rPr lang="en-US" i="1" dirty="0"/>
+              <a:t>Point out that the database templates can be used to create a complete database schema, or you can start with a blank database and add individual tables based on the table definitions in the templates. The templates are based on common database design patterns in enterprise database scenarios; but can be customized to your specific needs.</a:t>
+            </a:r>
+          </a:p>
+        </p:txBody>
+      </p:sp>
+      <p:sp>
+        <p:nvSpPr>
+          <p:cNvPr id="4" name="Header Placeholder 3"/>
+          <p:cNvSpPr>
+            <a:spLocks noGrp="1"/>
+          </p:cNvSpPr>
+          <p:nvPr>
+            <p:ph type="hdr" sz="quarter"/>
           </p:nvPr>
         </p:nvSpPr>
         <p:spPr/>
@@ -2104,9 +2093,676 @@
           <a:bodyPr/>
           <a:lstStyle/>
           <a:p>
+            <a:endParaRPr lang="en-US" dirty="0"/>
+          </a:p>
+        </p:txBody>
+      </p:sp>
+      <p:sp>
+        <p:nvSpPr>
+          <p:cNvPr id="5" name="Footer Placeholder 4"/>
+          <p:cNvSpPr>
+            <a:spLocks noGrp="1"/>
+          </p:cNvSpPr>
+          <p:nvPr>
+            <p:ph type="ftr" sz="quarter" idx="4"/>
+          </p:nvPr>
+        </p:nvSpPr>
+        <p:spPr/>
+        <p:txBody>
+          <a:bodyPr/>
+          <a:lstStyle/>
+          <a:p>
+            <a:pPr defTabSz="914099" eaLnBrk="0" hangingPunct="0"/>
+            <a:r>
+              <a:rPr lang="en-US" sz="400">
+                <a:gradFill>
+                  <a:gsLst>
+                    <a:gs pos="0">
+                      <a:prstClr val="black"/>
+                    </a:gs>
+                    <a:gs pos="100000">
+                      <a:prstClr val="black"/>
+                    </a:gs>
+                  </a:gsLst>
+                  <a:lin ang="5400000" scaled="0"/>
+                </a:gradFill>
+                <a:latin typeface="Segoe UI" pitchFamily="34" charset="0"/>
+                <a:ea typeface="Segoe UI" pitchFamily="34" charset="0"/>
+                <a:cs typeface="Segoe UI" pitchFamily="34" charset="0"/>
+              </a:rPr>
+              <a:t>© Microsoft Corporation</a:t>
+            </a:r>
+            <a:endParaRPr lang="en-US" sz="400" dirty="0">
+              <a:gradFill>
+                <a:gsLst>
+                  <a:gs pos="0">
+                    <a:prstClr val="black"/>
+                  </a:gs>
+                  <a:gs pos="100000">
+                    <a:prstClr val="black"/>
+                  </a:gs>
+                </a:gsLst>
+                <a:lin ang="5400000" scaled="0"/>
+              </a:gradFill>
+              <a:latin typeface="Segoe UI" pitchFamily="34" charset="0"/>
+              <a:ea typeface="Segoe UI" pitchFamily="34" charset="0"/>
+              <a:cs typeface="Segoe UI" pitchFamily="34" charset="0"/>
+            </a:endParaRPr>
+          </a:p>
+        </p:txBody>
+      </p:sp>
+      <p:sp>
+        <p:nvSpPr>
+          <p:cNvPr id="6" name="Slide Number Placeholder 5"/>
+          <p:cNvSpPr>
+            <a:spLocks noGrp="1"/>
+          </p:cNvSpPr>
+          <p:nvPr>
+            <p:ph type="sldNum" sz="quarter" idx="5"/>
+          </p:nvPr>
+        </p:nvSpPr>
+        <p:spPr/>
+        <p:txBody>
+          <a:bodyPr/>
+          <a:lstStyle/>
+          <a:p>
+            <a:fld id="{B4008EB6-D09E-4580-8CD6-DDB14511944F}" type="slidenum">
+              <a:rPr lang="en-US" smtClean="0"/>
+              <a:pPr/>
+              <a:t>5</a:t>
+            </a:fld>
+            <a:endParaRPr lang="en-US" dirty="0"/>
+          </a:p>
+        </p:txBody>
+      </p:sp>
+    </p:spTree>
+    <p:extLst>
+      <p:ext uri="{BB962C8B-B14F-4D97-AF65-F5344CB8AC3E}">
+        <p14:creationId xmlns:p14="http://schemas.microsoft.com/office/powerpoint/2010/main" val="2246398693"/>
+      </p:ext>
+    </p:extLst>
+  </p:cSld>
+  <p:clrMapOvr>
+    <a:masterClrMapping/>
+  </p:clrMapOvr>
+</p:notes>
+</file>
+
+<file path=ppt/notesSlides/notesSlide5.xml><?xml version="1.0" encoding="utf-8"?>
+<p:notes xmlns:a="http://schemas.openxmlformats.org/drawingml/2006/main" xmlns:r="http://schemas.openxmlformats.org/officeDocument/2006/relationships" xmlns:p="http://schemas.openxmlformats.org/presentationml/2006/main">
+  <p:cSld>
+    <p:spTree>
+      <p:nvGrpSpPr>
+        <p:cNvPr id="1" name=""/>
+        <p:cNvGrpSpPr/>
+        <p:nvPr/>
+      </p:nvGrpSpPr>
+      <p:grpSpPr>
+        <a:xfrm>
+          <a:off x="0" y="0"/>
+          <a:ext cx="0" cy="0"/>
+          <a:chOff x="0" y="0"/>
+          <a:chExt cx="0" cy="0"/>
+        </a:xfrm>
+      </p:grpSpPr>
+      <p:sp>
+        <p:nvSpPr>
+          <p:cNvPr id="2" name="Slide Image Placeholder 1"/>
+          <p:cNvSpPr>
+            <a:spLocks noGrp="1" noRot="1" noChangeAspect="1"/>
+          </p:cNvSpPr>
+          <p:nvPr>
+            <p:ph type="sldImg"/>
+          </p:nvPr>
+        </p:nvSpPr>
+        <p:spPr/>
+      </p:sp>
+      <p:sp>
+        <p:nvSpPr>
+          <p:cNvPr id="3" name="Notes Placeholder 2"/>
+          <p:cNvSpPr>
+            <a:spLocks noGrp="1"/>
+          </p:cNvSpPr>
+          <p:nvPr>
+            <p:ph type="body" idx="1"/>
+          </p:nvPr>
+        </p:nvSpPr>
+        <p:spPr/>
+        <p:txBody>
+          <a:bodyPr/>
+          <a:lstStyle/>
+          <a:p>
+            <a:r>
+              <a:rPr lang="en-US" i="1" dirty="0"/>
+              <a:t>The database designer can greatly simplify the creation of complex database schema.</a:t>
+            </a:r>
+          </a:p>
+        </p:txBody>
+      </p:sp>
+      <p:sp>
+        <p:nvSpPr>
+          <p:cNvPr id="4" name="Header Placeholder 3"/>
+          <p:cNvSpPr>
+            <a:spLocks noGrp="1"/>
+          </p:cNvSpPr>
+          <p:nvPr>
+            <p:ph type="hdr" sz="quarter"/>
+          </p:nvPr>
+        </p:nvSpPr>
+        <p:spPr/>
+        <p:txBody>
+          <a:bodyPr/>
+          <a:lstStyle/>
+          <a:p>
+            <a:endParaRPr lang="en-US" dirty="0"/>
+          </a:p>
+        </p:txBody>
+      </p:sp>
+      <p:sp>
+        <p:nvSpPr>
+          <p:cNvPr id="5" name="Footer Placeholder 4"/>
+          <p:cNvSpPr>
+            <a:spLocks noGrp="1"/>
+          </p:cNvSpPr>
+          <p:nvPr>
+            <p:ph type="ftr" sz="quarter" idx="4"/>
+          </p:nvPr>
+        </p:nvSpPr>
+        <p:spPr/>
+        <p:txBody>
+          <a:bodyPr/>
+          <a:lstStyle/>
+          <a:p>
+            <a:pPr defTabSz="914099" eaLnBrk="0" hangingPunct="0"/>
+            <a:r>
+              <a:rPr lang="en-US" sz="400">
+                <a:gradFill>
+                  <a:gsLst>
+                    <a:gs pos="0">
+                      <a:prstClr val="black"/>
+                    </a:gs>
+                    <a:gs pos="100000">
+                      <a:prstClr val="black"/>
+                    </a:gs>
+                  </a:gsLst>
+                  <a:lin ang="5400000" scaled="0"/>
+                </a:gradFill>
+                <a:latin typeface="Segoe UI" pitchFamily="34" charset="0"/>
+                <a:ea typeface="Segoe UI" pitchFamily="34" charset="0"/>
+                <a:cs typeface="Segoe UI" pitchFamily="34" charset="0"/>
+              </a:rPr>
+              <a:t>© Microsoft Corporation</a:t>
+            </a:r>
+            <a:endParaRPr lang="en-US" sz="400" dirty="0">
+              <a:gradFill>
+                <a:gsLst>
+                  <a:gs pos="0">
+                    <a:prstClr val="black"/>
+                  </a:gs>
+                  <a:gs pos="100000">
+                    <a:prstClr val="black"/>
+                  </a:gs>
+                </a:gsLst>
+                <a:lin ang="5400000" scaled="0"/>
+              </a:gradFill>
+              <a:latin typeface="Segoe UI" pitchFamily="34" charset="0"/>
+              <a:ea typeface="Segoe UI" pitchFamily="34" charset="0"/>
+              <a:cs typeface="Segoe UI" pitchFamily="34" charset="0"/>
+            </a:endParaRPr>
+          </a:p>
+        </p:txBody>
+      </p:sp>
+      <p:sp>
+        <p:nvSpPr>
+          <p:cNvPr id="6" name="Slide Number Placeholder 5"/>
+          <p:cNvSpPr>
+            <a:spLocks noGrp="1"/>
+          </p:cNvSpPr>
+          <p:nvPr>
+            <p:ph type="sldNum" sz="quarter" idx="5"/>
+          </p:nvPr>
+        </p:nvSpPr>
+        <p:spPr/>
+        <p:txBody>
+          <a:bodyPr/>
+          <a:lstStyle/>
+          <a:p>
+            <a:fld id="{B4008EB6-D09E-4580-8CD6-DDB14511944F}" type="slidenum">
+              <a:rPr lang="en-US" smtClean="0"/>
+              <a:pPr/>
+              <a:t>6</a:t>
+            </a:fld>
+            <a:endParaRPr lang="en-US" dirty="0"/>
+          </a:p>
+        </p:txBody>
+      </p:sp>
+    </p:spTree>
+    <p:extLst>
+      <p:ext uri="{BB962C8B-B14F-4D97-AF65-F5344CB8AC3E}">
+        <p14:creationId xmlns:p14="http://schemas.microsoft.com/office/powerpoint/2010/main" val="513456417"/>
+      </p:ext>
+    </p:extLst>
+  </p:cSld>
+  <p:clrMapOvr>
+    <a:masterClrMapping/>
+  </p:clrMapOvr>
+</p:notes>
+</file>
+
+<file path=ppt/notesSlides/notesSlide6.xml><?xml version="1.0" encoding="utf-8"?>
+<p:notes xmlns:a="http://schemas.openxmlformats.org/drawingml/2006/main" xmlns:r="http://schemas.openxmlformats.org/officeDocument/2006/relationships" xmlns:p="http://schemas.openxmlformats.org/presentationml/2006/main">
+  <p:cSld>
+    <p:spTree>
+      <p:nvGrpSpPr>
+        <p:cNvPr id="1" name=""/>
+        <p:cNvGrpSpPr/>
+        <p:nvPr/>
+      </p:nvGrpSpPr>
+      <p:grpSpPr>
+        <a:xfrm>
+          <a:off x="0" y="0"/>
+          <a:ext cx="0" cy="0"/>
+          <a:chOff x="0" y="0"/>
+          <a:chExt cx="0" cy="0"/>
+        </a:xfrm>
+      </p:grpSpPr>
+      <p:sp>
+        <p:nvSpPr>
+          <p:cNvPr id="2" name="Slide Image Placeholder 1"/>
+          <p:cNvSpPr>
+            <a:spLocks noGrp="1" noRot="1" noChangeAspect="1"/>
+          </p:cNvSpPr>
+          <p:nvPr>
+            <p:ph type="sldImg"/>
+          </p:nvPr>
+        </p:nvSpPr>
+        <p:spPr/>
+      </p:sp>
+      <p:sp>
+        <p:nvSpPr>
+          <p:cNvPr id="3" name="Notes Placeholder 2"/>
+          <p:cNvSpPr>
+            <a:spLocks noGrp="1"/>
+          </p:cNvSpPr>
+          <p:nvPr>
+            <p:ph type="body" idx="1"/>
+          </p:nvPr>
+        </p:nvSpPr>
+        <p:spPr/>
+        <p:txBody>
+          <a:bodyPr/>
+          <a:lstStyle/>
+          <a:p>
+            <a:r>
+              <a:rPr lang="en-US" i="1" dirty="0"/>
+              <a:t>The tables in a lake database can be queried in a SQL pool, but also in a Spark pool because the database schema is defined in the </a:t>
+            </a:r>
+            <a:r>
+              <a:rPr lang="en-US" i="1" dirty="0" err="1"/>
+              <a:t>metastore</a:t>
+            </a:r>
+            <a:r>
+              <a:rPr lang="en-US" i="1" dirty="0"/>
+              <a:t> for Spark pools in the workspace.</a:t>
+            </a:r>
+          </a:p>
+        </p:txBody>
+      </p:sp>
+      <p:sp>
+        <p:nvSpPr>
+          <p:cNvPr id="4" name="Header Placeholder 3"/>
+          <p:cNvSpPr>
+            <a:spLocks noGrp="1"/>
+          </p:cNvSpPr>
+          <p:nvPr>
+            <p:ph type="hdr" sz="quarter"/>
+          </p:nvPr>
+        </p:nvSpPr>
+        <p:spPr/>
+        <p:txBody>
+          <a:bodyPr/>
+          <a:lstStyle/>
+          <a:p>
+            <a:endParaRPr lang="en-US" dirty="0"/>
+          </a:p>
+        </p:txBody>
+      </p:sp>
+      <p:sp>
+        <p:nvSpPr>
+          <p:cNvPr id="5" name="Footer Placeholder 4"/>
+          <p:cNvSpPr>
+            <a:spLocks noGrp="1"/>
+          </p:cNvSpPr>
+          <p:nvPr>
+            <p:ph type="ftr" sz="quarter" idx="4"/>
+          </p:nvPr>
+        </p:nvSpPr>
+        <p:spPr/>
+        <p:txBody>
+          <a:bodyPr/>
+          <a:lstStyle/>
+          <a:p>
+            <a:pPr defTabSz="914099" eaLnBrk="0" hangingPunct="0"/>
+            <a:r>
+              <a:rPr lang="en-US" sz="400">
+                <a:gradFill>
+                  <a:gsLst>
+                    <a:gs pos="0">
+                      <a:prstClr val="black"/>
+                    </a:gs>
+                    <a:gs pos="100000">
+                      <a:prstClr val="black"/>
+                    </a:gs>
+                  </a:gsLst>
+                  <a:lin ang="5400000" scaled="0"/>
+                </a:gradFill>
+                <a:latin typeface="Segoe UI" pitchFamily="34" charset="0"/>
+                <a:ea typeface="Segoe UI" pitchFamily="34" charset="0"/>
+                <a:cs typeface="Segoe UI" pitchFamily="34" charset="0"/>
+              </a:rPr>
+              <a:t>© Microsoft Corporation</a:t>
+            </a:r>
+            <a:endParaRPr lang="en-US" sz="400" dirty="0">
+              <a:gradFill>
+                <a:gsLst>
+                  <a:gs pos="0">
+                    <a:prstClr val="black"/>
+                  </a:gs>
+                  <a:gs pos="100000">
+                    <a:prstClr val="black"/>
+                  </a:gs>
+                </a:gsLst>
+                <a:lin ang="5400000" scaled="0"/>
+              </a:gradFill>
+              <a:latin typeface="Segoe UI" pitchFamily="34" charset="0"/>
+              <a:ea typeface="Segoe UI" pitchFamily="34" charset="0"/>
+              <a:cs typeface="Segoe UI" pitchFamily="34" charset="0"/>
+            </a:endParaRPr>
+          </a:p>
+        </p:txBody>
+      </p:sp>
+      <p:sp>
+        <p:nvSpPr>
+          <p:cNvPr id="6" name="Slide Number Placeholder 5"/>
+          <p:cNvSpPr>
+            <a:spLocks noGrp="1"/>
+          </p:cNvSpPr>
+          <p:nvPr>
+            <p:ph type="sldNum" sz="quarter" idx="5"/>
+          </p:nvPr>
+        </p:nvSpPr>
+        <p:spPr/>
+        <p:txBody>
+          <a:bodyPr/>
+          <a:lstStyle/>
+          <a:p>
+            <a:fld id="{B4008EB6-D09E-4580-8CD6-DDB14511944F}" type="slidenum">
+              <a:rPr lang="en-US" smtClean="0"/>
+              <a:pPr/>
+              <a:t>7</a:t>
+            </a:fld>
+            <a:endParaRPr lang="en-US" dirty="0"/>
+          </a:p>
+        </p:txBody>
+      </p:sp>
+    </p:spTree>
+    <p:extLst>
+      <p:ext uri="{BB962C8B-B14F-4D97-AF65-F5344CB8AC3E}">
+        <p14:creationId xmlns:p14="http://schemas.microsoft.com/office/powerpoint/2010/main" val="1339823272"/>
+      </p:ext>
+    </p:extLst>
+  </p:cSld>
+  <p:clrMapOvr>
+    <a:masterClrMapping/>
+  </p:clrMapOvr>
+</p:notes>
+</file>
+
+<file path=ppt/notesSlides/notesSlide7.xml><?xml version="1.0" encoding="utf-8"?>
+<p:notes xmlns:a="http://schemas.openxmlformats.org/drawingml/2006/main" xmlns:r="http://schemas.openxmlformats.org/officeDocument/2006/relationships" xmlns:p="http://schemas.openxmlformats.org/presentationml/2006/main">
+  <p:cSld>
+    <p:spTree>
+      <p:nvGrpSpPr>
+        <p:cNvPr id="1" name=""/>
+        <p:cNvGrpSpPr/>
+        <p:nvPr/>
+      </p:nvGrpSpPr>
+      <p:grpSpPr>
+        <a:xfrm>
+          <a:off x="0" y="0"/>
+          <a:ext cx="0" cy="0"/>
+          <a:chOff x="0" y="0"/>
+          <a:chExt cx="0" cy="0"/>
+        </a:xfrm>
+      </p:grpSpPr>
+      <p:sp>
+        <p:nvSpPr>
+          <p:cNvPr id="2" name="Slide Image Placeholder 1"/>
+          <p:cNvSpPr>
+            <a:spLocks noGrp="1" noRot="1" noChangeAspect="1"/>
+          </p:cNvSpPr>
+          <p:nvPr>
+            <p:ph type="sldImg"/>
+          </p:nvPr>
+        </p:nvSpPr>
+        <p:spPr/>
+      </p:sp>
+      <p:sp>
+        <p:nvSpPr>
+          <p:cNvPr id="3" name="Notes Placeholder 2"/>
+          <p:cNvSpPr>
+            <a:spLocks noGrp="1"/>
+          </p:cNvSpPr>
+          <p:nvPr>
+            <p:ph type="body" idx="1"/>
+          </p:nvPr>
+        </p:nvSpPr>
+        <p:spPr/>
+        <p:txBody>
+          <a:bodyPr/>
+          <a:lstStyle/>
+          <a:p>
+            <a:pPr algn="l" rtl="0" fontAlgn="base"/>
+            <a:r>
+              <a:rPr lang="en-US" sz="1200" b="1" i="0" u="none" strike="noStrike" dirty="0">
+                <a:solidFill>
+                  <a:srgbClr val="000000"/>
+                </a:solidFill>
+                <a:effectLst/>
+                <a:latin typeface="Helvetica Neue"/>
+              </a:rPr>
+              <a:t>TALKING POINTS</a:t>
+            </a:r>
+            <a:r>
+              <a:rPr lang="en-US" sz="1200" b="0" i="0" dirty="0">
+                <a:effectLst/>
+                <a:latin typeface="Helvetica Neue"/>
+              </a:rPr>
+              <a:t>​</a:t>
+            </a:r>
+            <a:endParaRPr lang="en-US" b="0" i="0" dirty="0">
+              <a:effectLst/>
+            </a:endParaRPr>
+          </a:p>
+          <a:p>
+            <a:pPr algn="l" rtl="0" fontAlgn="base"/>
+            <a:r>
+              <a:rPr lang="en-US" sz="1200" b="0" i="0" dirty="0">
+                <a:effectLst/>
+                <a:latin typeface="Helvetica Neue"/>
+              </a:rPr>
+              <a:t>​</a:t>
+            </a:r>
+            <a:endParaRPr lang="en-US" b="0" i="0" dirty="0">
+              <a:effectLst/>
+            </a:endParaRPr>
+          </a:p>
+          <a:p>
+            <a:pPr algn="l" rtl="0" fontAlgn="base"/>
+            <a:r>
+              <a:rPr lang="en-US" sz="1200" b="0" i="0" u="none" strike="noStrike" dirty="0">
+                <a:solidFill>
+                  <a:srgbClr val="000000"/>
+                </a:solidFill>
+                <a:effectLst/>
+                <a:latin typeface="Helvetica Neue"/>
+              </a:rPr>
+              <a:t>Let’s put this into reality and show you how it works.</a:t>
+            </a:r>
+            <a:r>
+              <a:rPr lang="en-US" sz="1200" b="0" i="0" dirty="0">
+                <a:effectLst/>
+                <a:latin typeface="Helvetica Neue"/>
+              </a:rPr>
+              <a:t>​</a:t>
+            </a:r>
+            <a:endParaRPr lang="en-US" b="0" i="0" dirty="0">
+              <a:effectLst/>
+            </a:endParaRPr>
+          </a:p>
+          <a:p>
+            <a:pPr algn="l" rtl="0" fontAlgn="base"/>
+            <a:r>
+              <a:rPr lang="en-US" sz="1200" b="0" i="0" dirty="0">
+                <a:effectLst/>
+                <a:latin typeface="Helvetica Neue"/>
+              </a:rPr>
+              <a:t>​</a:t>
+            </a:r>
+            <a:endParaRPr lang="en-US" b="0" i="0" dirty="0">
+              <a:effectLst/>
+            </a:endParaRPr>
+          </a:p>
+          <a:p>
+            <a:pPr algn="l" rtl="0" fontAlgn="base"/>
+            <a:r>
+              <a:rPr lang="en-US" sz="1200" b="0" i="0" u="none" strike="noStrike" dirty="0">
+                <a:solidFill>
+                  <a:srgbClr val="000000"/>
+                </a:solidFill>
+                <a:effectLst/>
+                <a:latin typeface="Helvetica Neue"/>
+              </a:rPr>
+              <a:t>All instructions and context are found in this repository</a:t>
+            </a:r>
+            <a:r>
+              <a:rPr lang="en-US" sz="1200" b="0" i="0" dirty="0">
+                <a:effectLst/>
+                <a:latin typeface="Helvetica Neue"/>
+              </a:rPr>
+              <a:t>​</a:t>
+            </a:r>
+            <a:endParaRPr lang="en-US" b="0" i="0" dirty="0">
+              <a:effectLst/>
+            </a:endParaRPr>
+          </a:p>
+          <a:p>
+            <a:endParaRPr lang="en-GB" dirty="0"/>
+          </a:p>
+        </p:txBody>
+      </p:sp>
+      <p:sp>
+        <p:nvSpPr>
+          <p:cNvPr id="4" name="Slide Number Placeholder 3"/>
+          <p:cNvSpPr>
+            <a:spLocks noGrp="1"/>
+          </p:cNvSpPr>
+          <p:nvPr>
+            <p:ph type="sldNum" sz="quarter" idx="5"/>
+          </p:nvPr>
+        </p:nvSpPr>
+        <p:spPr/>
+        <p:txBody>
+          <a:bodyPr/>
+          <a:lstStyle/>
+          <a:p>
             <a:fld id="{37E24C93-78CA-4AF0-9E77-825D60ABA46D}" type="slidenum">
               <a:rPr lang="en-US" smtClean="0"/>
-              <a:t>5</a:t>
+              <a:t>8</a:t>
+            </a:fld>
+            <a:endParaRPr lang="en-US" dirty="0"/>
+          </a:p>
+        </p:txBody>
+      </p:sp>
+    </p:spTree>
+    <p:extLst>
+      <p:ext uri="{BB962C8B-B14F-4D97-AF65-F5344CB8AC3E}">
+        <p14:creationId xmlns:p14="http://schemas.microsoft.com/office/powerpoint/2010/main" val="1674645597"/>
+      </p:ext>
+    </p:extLst>
+  </p:cSld>
+  <p:clrMapOvr>
+    <a:masterClrMapping/>
+  </p:clrMapOvr>
+</p:notes>
+</file>
+
+<file path=ppt/notesSlides/notesSlide8.xml><?xml version="1.0" encoding="utf-8"?>
+<p:notes xmlns:a="http://schemas.openxmlformats.org/drawingml/2006/main" xmlns:r="http://schemas.openxmlformats.org/officeDocument/2006/relationships" xmlns:p="http://schemas.openxmlformats.org/presentationml/2006/main">
+  <p:cSld>
+    <p:spTree>
+      <p:nvGrpSpPr>
+        <p:cNvPr id="1" name=""/>
+        <p:cNvGrpSpPr/>
+        <p:nvPr/>
+      </p:nvGrpSpPr>
+      <p:grpSpPr>
+        <a:xfrm>
+          <a:off x="0" y="0"/>
+          <a:ext cx="0" cy="0"/>
+          <a:chOff x="0" y="0"/>
+          <a:chExt cx="0" cy="0"/>
+        </a:xfrm>
+      </p:grpSpPr>
+      <p:sp>
+        <p:nvSpPr>
+          <p:cNvPr id="2" name="Slide Image Placeholder 1"/>
+          <p:cNvSpPr>
+            <a:spLocks noGrp="1" noRot="1" noChangeAspect="1"/>
+          </p:cNvSpPr>
+          <p:nvPr>
+            <p:ph type="sldImg"/>
+          </p:nvPr>
+        </p:nvSpPr>
+        <p:spPr/>
+      </p:sp>
+      <p:sp>
+        <p:nvSpPr>
+          <p:cNvPr id="3" name="Notes Placeholder 2"/>
+          <p:cNvSpPr>
+            <a:spLocks noGrp="1"/>
+          </p:cNvSpPr>
+          <p:nvPr>
+            <p:ph type="body" idx="1"/>
+          </p:nvPr>
+        </p:nvSpPr>
+        <p:spPr/>
+        <p:txBody>
+          <a:bodyPr/>
+          <a:lstStyle/>
+          <a:p>
+            <a:endParaRPr lang="en-US" dirty="0"/>
+          </a:p>
+        </p:txBody>
+      </p:sp>
+      <p:sp>
+        <p:nvSpPr>
+          <p:cNvPr id="4" name="Slide Number Placeholder 3"/>
+          <p:cNvSpPr>
+            <a:spLocks noGrp="1"/>
+          </p:cNvSpPr>
+          <p:nvPr>
+            <p:ph type="sldNum" sz="quarter" idx="5"/>
+          </p:nvPr>
+        </p:nvSpPr>
+        <p:spPr/>
+        <p:txBody>
+          <a:bodyPr/>
+          <a:lstStyle/>
+          <a:p>
+            <a:fld id="{37E24C93-78CA-4AF0-9E77-825D60ABA46D}" type="slidenum">
+              <a:rPr lang="en-US" smtClean="0"/>
+              <a:t>9</a:t>
             </a:fld>
             <a:endParaRPr lang="en-US"/>
           </a:p>
@@ -15229,6 +15885,853 @@
 </p:sldLayout>
 </file>
 
+<file path=ppt/slideLayouts/slideLayout38.xml><?xml version="1.0" encoding="utf-8"?>
+<p:sldLayout xmlns:a="http://schemas.openxmlformats.org/drawingml/2006/main" xmlns:r="http://schemas.openxmlformats.org/officeDocument/2006/relationships" xmlns:p="http://schemas.openxmlformats.org/presentationml/2006/main" userDrawn="1">
+  <p:cSld name="1-column_Callout_with Image">
+    <p:bg>
+      <p:bgRef idx="1001">
+        <a:schemeClr val="bg1"/>
+      </p:bgRef>
+    </p:bg>
+    <p:spTree>
+      <p:nvGrpSpPr>
+        <p:cNvPr id="1" name=""/>
+        <p:cNvGrpSpPr/>
+        <p:nvPr/>
+      </p:nvGrpSpPr>
+      <p:grpSpPr>
+        <a:xfrm>
+          <a:off x="0" y="0"/>
+          <a:ext cx="0" cy="0"/>
+          <a:chOff x="0" y="0"/>
+          <a:chExt cx="0" cy="0"/>
+        </a:xfrm>
+      </p:grpSpPr>
+      <p:sp>
+        <p:nvSpPr>
+          <p:cNvPr id="7" name="Footer Placeholder 10">
+            <a:extLst>
+              <a:ext uri="{FF2B5EF4-FFF2-40B4-BE49-F238E27FC236}">
+                <a16:creationId xmlns:a16="http://schemas.microsoft.com/office/drawing/2014/main" id="{5E5F3DC3-1739-4680-A88C-C7B8F0E6D388}"/>
+              </a:ext>
+            </a:extLst>
+          </p:cNvPr>
+          <p:cNvSpPr>
+            <a:spLocks noGrp="1"/>
+          </p:cNvSpPr>
+          <p:nvPr>
+            <p:ph type="ftr" sz="quarter" idx="3"/>
+          </p:nvPr>
+        </p:nvSpPr>
+        <p:spPr>
+          <a:xfrm>
+            <a:off x="586389" y="6421083"/>
+            <a:ext cx="4151312" cy="197976"/>
+          </a:xfrm>
+          <a:prstGeom prst="rect">
+            <a:avLst/>
+          </a:prstGeom>
+        </p:spPr>
+        <p:txBody>
+          <a:bodyPr vert="horz" lIns="0" tIns="0" rIns="0" bIns="0" rtlCol="0" anchor="ctr"/>
+          <a:lstStyle>
+            <a:lvl1pPr marL="0" algn="l" defTabSz="914400" rtl="0" eaLnBrk="1" latinLnBrk="0" hangingPunct="1">
+              <a:defRPr lang="en-US" sz="1000" kern="1200" dirty="0">
+                <a:solidFill>
+                  <a:schemeClr val="tx1"/>
+                </a:solidFill>
+                <a:latin typeface="+mn-lt"/>
+                <a:ea typeface="+mn-ea"/>
+                <a:cs typeface="+mn-cs"/>
+              </a:defRPr>
+            </a:lvl1pPr>
+            <a:lvl5pPr>
+              <a:defRPr lang="en-US" sz="750" kern="100" cap="all" spc="0" baseline="0" dirty="0">
+                <a:solidFill>
+                  <a:schemeClr val="tx1"/>
+                </a:solidFill>
+                <a:latin typeface="Arial" panose="020B0604020202020204" pitchFamily="34" charset="0"/>
+                <a:ea typeface="+mn-ea"/>
+                <a:cs typeface="Arial" panose="020B0604020202020204" pitchFamily="34" charset="0"/>
+              </a:defRPr>
+            </a:lvl5pPr>
+          </a:lstStyle>
+          <a:p>
+            <a:pPr defTabSz="914367">
+              <a:defRPr/>
+            </a:pPr>
+            <a:r>
+              <a:rPr lang="en-US">
+                <a:solidFill>
+                  <a:srgbClr val="000000"/>
+                </a:solidFill>
+              </a:rPr>
+              <a:t>© Copyright Microsoft Corporation. All rights reserved.</a:t>
+            </a:r>
+          </a:p>
+        </p:txBody>
+      </p:sp>
+      <p:sp>
+        <p:nvSpPr>
+          <p:cNvPr id="2" name="Title 1">
+            <a:extLst>
+              <a:ext uri="{FF2B5EF4-FFF2-40B4-BE49-F238E27FC236}">
+                <a16:creationId xmlns:a16="http://schemas.microsoft.com/office/drawing/2014/main" id="{BCE35D3C-86EE-875E-D2A6-669DF7E1C19A}"/>
+              </a:ext>
+            </a:extLst>
+          </p:cNvPr>
+          <p:cNvSpPr>
+            <a:spLocks noGrp="1"/>
+          </p:cNvSpPr>
+          <p:nvPr>
+            <p:ph type="title"/>
+          </p:nvPr>
+        </p:nvSpPr>
+        <p:spPr>
+          <a:xfrm>
+            <a:off x="588262" y="585216"/>
+            <a:ext cx="11044938" cy="492443"/>
+          </a:xfrm>
+        </p:spPr>
+        <p:txBody>
+          <a:bodyPr/>
+          <a:lstStyle>
+            <a:lvl1pPr>
+              <a:defRPr sz="3200" b="0" i="0">
+                <a:solidFill>
+                  <a:schemeClr val="tx1"/>
+                </a:solidFill>
+                <a:latin typeface="+mj-lt"/>
+                <a:cs typeface="Segoe UI Semibold" panose="020B0502040204020203" pitchFamily="34" charset="0"/>
+              </a:defRPr>
+            </a:lvl1pPr>
+          </a:lstStyle>
+          <a:p>
+            <a:r>
+              <a:rPr lang="en-US"/>
+              <a:t>Click to edit Master title style</a:t>
+            </a:r>
+          </a:p>
+        </p:txBody>
+      </p:sp>
+      <p:sp>
+        <p:nvSpPr>
+          <p:cNvPr id="4" name="Picture Placeholder" descr="This photo is a 'placeholder' only. Drag or drop your photo here, or click and tap the center to insert a photo.">
+            <a:extLst>
+              <a:ext uri="{FF2B5EF4-FFF2-40B4-BE49-F238E27FC236}">
+                <a16:creationId xmlns:a16="http://schemas.microsoft.com/office/drawing/2014/main" id="{FA07B0D1-31C1-C209-CE85-DD1D42B62A74}"/>
+              </a:ext>
+            </a:extLst>
+          </p:cNvPr>
+          <p:cNvSpPr>
+            <a:spLocks noGrp="1"/>
+          </p:cNvSpPr>
+          <p:nvPr>
+            <p:ph type="pic" sz="quarter" idx="20" hasCustomPrompt="1"/>
+          </p:nvPr>
+        </p:nvSpPr>
+        <p:spPr bwMode="ltGray">
+          <a:xfrm>
+            <a:off x="4064000" y="1581150"/>
+            <a:ext cx="7535862" cy="4430720"/>
+          </a:xfrm>
+          <a:prstGeom prst="rect">
+            <a:avLst/>
+          </a:prstGeom>
+          <a:solidFill>
+            <a:srgbClr val="F4F4F7"/>
+          </a:solidFill>
+          <a:ln>
+            <a:noFill/>
+          </a:ln>
+        </p:spPr>
+        <p:txBody>
+          <a:bodyPr lIns="0" tIns="0" rIns="0" bIns="731520" anchor="ctr" anchorCtr="0">
+            <a:noAutofit/>
+          </a:bodyPr>
+          <a:lstStyle>
+            <a:lvl1pPr marL="0" indent="0" algn="ctr">
+              <a:lnSpc>
+                <a:spcPct val="100000"/>
+              </a:lnSpc>
+              <a:buNone/>
+              <a:defRPr sz="1050" b="1">
+                <a:solidFill>
+                  <a:srgbClr val="000000"/>
+                </a:solidFill>
+                <a:latin typeface="+mn-lt"/>
+                <a:cs typeface="Segoe UI" panose="020B0502040204020203" pitchFamily="34" charset="0"/>
+              </a:defRPr>
+            </a:lvl1pPr>
+          </a:lstStyle>
+          <a:p>
+            <a:r>
+              <a:rPr lang="en-US"/>
+              <a:t>Drag &amp; drop your photo</a:t>
+            </a:r>
+          </a:p>
+          <a:p>
+            <a:r>
+              <a:rPr lang="en-US"/>
+              <a:t>here or click or tap </a:t>
+            </a:r>
+          </a:p>
+          <a:p>
+            <a:r>
+              <a:rPr lang="en-US"/>
+              <a:t>icon below to insert</a:t>
+            </a:r>
+          </a:p>
+          <a:p>
+            <a:endParaRPr lang="en-US"/>
+          </a:p>
+          <a:p>
+            <a:endParaRPr lang="en-US"/>
+          </a:p>
+        </p:txBody>
+      </p:sp>
+      <p:sp>
+        <p:nvSpPr>
+          <p:cNvPr id="6" name="Text Placeholder 11">
+            <a:extLst>
+              <a:ext uri="{FF2B5EF4-FFF2-40B4-BE49-F238E27FC236}">
+                <a16:creationId xmlns:a16="http://schemas.microsoft.com/office/drawing/2014/main" id="{BA3E60F0-F025-04E8-0E46-71699A62E435}"/>
+              </a:ext>
+            </a:extLst>
+          </p:cNvPr>
+          <p:cNvSpPr>
+            <a:spLocks noGrp="1"/>
+          </p:cNvSpPr>
+          <p:nvPr>
+            <p:ph type="body" sz="quarter" idx="16"/>
+          </p:nvPr>
+        </p:nvSpPr>
+        <p:spPr>
+          <a:xfrm>
+            <a:off x="584200" y="1594155"/>
+            <a:ext cx="3174143" cy="246221"/>
+          </a:xfrm>
+          <a:prstGeom prst="rect">
+            <a:avLst/>
+          </a:prstGeom>
+        </p:spPr>
+        <p:txBody>
+          <a:bodyPr anchor="t"/>
+          <a:lstStyle>
+            <a:lvl1pPr marL="0" indent="0">
+              <a:spcBef>
+                <a:spcPts val="0"/>
+              </a:spcBef>
+              <a:buNone/>
+              <a:defRPr sz="1600">
+                <a:solidFill>
+                  <a:schemeClr val="tx1"/>
+                </a:solidFill>
+                <a:latin typeface="+mj-lt"/>
+              </a:defRPr>
+            </a:lvl1pPr>
+          </a:lstStyle>
+          <a:p>
+            <a:pPr lvl="0"/>
+            <a:r>
+              <a:rPr lang="en-US"/>
+              <a:t>Click to edit Master text styles</a:t>
+            </a:r>
+          </a:p>
+        </p:txBody>
+      </p:sp>
+      <p:sp>
+        <p:nvSpPr>
+          <p:cNvPr id="8" name="Text Placeholder 3">
+            <a:extLst>
+              <a:ext uri="{FF2B5EF4-FFF2-40B4-BE49-F238E27FC236}">
+                <a16:creationId xmlns:a16="http://schemas.microsoft.com/office/drawing/2014/main" id="{4D105096-7BC3-1383-8EE1-744002B706B2}"/>
+              </a:ext>
+            </a:extLst>
+          </p:cNvPr>
+          <p:cNvSpPr>
+            <a:spLocks noGrp="1"/>
+          </p:cNvSpPr>
+          <p:nvPr>
+            <p:ph type="body" sz="quarter" idx="15"/>
+          </p:nvPr>
+        </p:nvSpPr>
+        <p:spPr>
+          <a:xfrm>
+            <a:off x="586389" y="2085764"/>
+            <a:ext cx="3172811" cy="726353"/>
+          </a:xfrm>
+          <a:prstGeom prst="rect">
+            <a:avLst/>
+          </a:prstGeom>
+        </p:spPr>
+        <p:txBody>
+          <a:bodyPr wrap="square">
+            <a:spAutoFit/>
+          </a:bodyPr>
+          <a:lstStyle>
+            <a:lvl1pPr marL="137160" indent="-137160">
+              <a:spcAft>
+                <a:spcPts val="0"/>
+              </a:spcAft>
+              <a:buFont typeface="Arial" panose="020B0604020202020204" pitchFamily="34" charset="0"/>
+              <a:buChar char="•"/>
+              <a:defRPr>
+                <a:solidFill>
+                  <a:schemeClr val="tx1"/>
+                </a:solidFill>
+              </a:defRPr>
+            </a:lvl1pPr>
+            <a:lvl2pPr marL="265176" indent="-128016">
+              <a:spcAft>
+                <a:spcPts val="0"/>
+              </a:spcAft>
+              <a:buFont typeface="Arial" panose="020B0604020202020204" pitchFamily="34" charset="0"/>
+              <a:buChar char="•"/>
+              <a:defRPr>
+                <a:solidFill>
+                  <a:schemeClr val="tx1"/>
+                </a:solidFill>
+              </a:defRPr>
+            </a:lvl2pPr>
+            <a:lvl3pPr marL="384048" indent="-118872">
+              <a:spcAft>
+                <a:spcPts val="0"/>
+              </a:spcAft>
+              <a:buFont typeface="Arial" panose="020B0604020202020204" pitchFamily="34" charset="0"/>
+              <a:buChar char="•"/>
+              <a:defRPr>
+                <a:solidFill>
+                  <a:schemeClr val="tx1"/>
+                </a:solidFill>
+              </a:defRPr>
+            </a:lvl3pPr>
+            <a:lvl4pPr marL="685800" indent="0">
+              <a:buNone/>
+              <a:defRPr/>
+            </a:lvl4pPr>
+            <a:lvl5pPr marL="914400" indent="0">
+              <a:buNone/>
+              <a:defRPr/>
+            </a:lvl5pPr>
+          </a:lstStyle>
+          <a:p>
+            <a:pPr lvl="0"/>
+            <a:r>
+              <a:rPr lang="en-US"/>
+              <a:t>Click to edit Master text styles</a:t>
+            </a:r>
+          </a:p>
+          <a:p>
+            <a:pPr lvl="1"/>
+            <a:r>
+              <a:rPr lang="en-US"/>
+              <a:t>Second level</a:t>
+            </a:r>
+          </a:p>
+          <a:p>
+            <a:pPr lvl="2"/>
+            <a:r>
+              <a:rPr lang="en-US"/>
+              <a:t>Third level</a:t>
+            </a:r>
+          </a:p>
+        </p:txBody>
+      </p:sp>
+    </p:spTree>
+    <p:extLst>
+      <p:ext uri="{BB962C8B-B14F-4D97-AF65-F5344CB8AC3E}">
+        <p14:creationId xmlns:p14="http://schemas.microsoft.com/office/powerpoint/2010/main" val="2242805381"/>
+      </p:ext>
+    </p:extLst>
+  </p:cSld>
+  <p:clrMapOvr>
+    <a:overrideClrMapping bg1="lt1" tx1="dk1" bg2="lt2" tx2="dk2" accent1="accent1" accent2="accent2" accent3="accent3" accent4="accent4" accent5="accent5" accent6="accent6" hlink="hlink" folHlink="folHlink"/>
+  </p:clrMapOvr>
+  <p:transition>
+    <p:fade/>
+  </p:transition>
+  <p:extLst>
+    <p:ext uri="{DCECCB84-F9BA-43D5-87BE-67443E8EF086}">
+      <p15:sldGuideLst xmlns:p15="http://schemas.microsoft.com/office/powerpoint/2012/main">
+        <p15:guide id="4" pos="778">
+          <p15:clr>
+            <a:srgbClr val="954F72"/>
+          </p15:clr>
+        </p15:guide>
+        <p15:guide id="5" pos="960">
+          <p15:clr>
+            <a:srgbClr val="954F72"/>
+          </p15:clr>
+        </p15:guide>
+        <p15:guide id="6" pos="1372">
+          <p15:clr>
+            <a:srgbClr val="954F72"/>
+          </p15:clr>
+        </p15:guide>
+        <p15:guide id="7" pos="1560">
+          <p15:clr>
+            <a:srgbClr val="954F72"/>
+          </p15:clr>
+        </p15:guide>
+        <p15:guide id="8" pos="1966">
+          <p15:clr>
+            <a:srgbClr val="954F72"/>
+          </p15:clr>
+        </p15:guide>
+        <p15:guide id="9" pos="2150">
+          <p15:clr>
+            <a:srgbClr val="954F72"/>
+          </p15:clr>
+        </p15:guide>
+        <p15:guide id="10" pos="2560">
+          <p15:clr>
+            <a:srgbClr val="954F72"/>
+          </p15:clr>
+        </p15:guide>
+        <p15:guide id="11" pos="2744">
+          <p15:clr>
+            <a:srgbClr val="954F72"/>
+          </p15:clr>
+        </p15:guide>
+        <p15:guide id="12" pos="3153">
+          <p15:clr>
+            <a:srgbClr val="954F72"/>
+          </p15:clr>
+        </p15:guide>
+        <p15:guide id="13" pos="3338">
+          <p15:clr>
+            <a:srgbClr val="954F72"/>
+          </p15:clr>
+        </p15:guide>
+        <p15:guide id="14" pos="3747">
+          <p15:clr>
+            <a:srgbClr val="954F72"/>
+          </p15:clr>
+        </p15:guide>
+        <p15:guide id="15" pos="3932">
+          <p15:clr>
+            <a:srgbClr val="954F72"/>
+          </p15:clr>
+        </p15:guide>
+        <p15:guide id="16" pos="4341">
+          <p15:clr>
+            <a:srgbClr val="954F72"/>
+          </p15:clr>
+        </p15:guide>
+        <p15:guide id="17" pos="4526">
+          <p15:clr>
+            <a:srgbClr val="954F72"/>
+          </p15:clr>
+        </p15:guide>
+        <p15:guide id="18" pos="4935">
+          <p15:clr>
+            <a:srgbClr val="954F72"/>
+          </p15:clr>
+        </p15:guide>
+        <p15:guide id="19" pos="5120">
+          <p15:clr>
+            <a:srgbClr val="954F72"/>
+          </p15:clr>
+        </p15:guide>
+        <p15:guide id="20" pos="5529">
+          <p15:clr>
+            <a:srgbClr val="954F72"/>
+          </p15:clr>
+        </p15:guide>
+        <p15:guide id="21" pos="5713">
+          <p15:clr>
+            <a:srgbClr val="954F72"/>
+          </p15:clr>
+        </p15:guide>
+        <p15:guide id="22" pos="6123">
+          <p15:clr>
+            <a:srgbClr val="954F72"/>
+          </p15:clr>
+        </p15:guide>
+        <p15:guide id="23" pos="6307">
+          <p15:clr>
+            <a:srgbClr val="954F72"/>
+          </p15:clr>
+        </p15:guide>
+        <p15:guide id="24" pos="6720">
+          <p15:clr>
+            <a:srgbClr val="954F72"/>
+          </p15:clr>
+        </p15:guide>
+        <p15:guide id="25" pos="6901">
+          <p15:clr>
+            <a:srgbClr val="954F72"/>
+          </p15:clr>
+        </p15:guide>
+        <p15:guide id="30" orient="horz" pos="812">
+          <p15:clr>
+            <a:srgbClr val="954F72"/>
+          </p15:clr>
+        </p15:guide>
+        <p15:guide id="31" orient="horz" pos="996">
+          <p15:clr>
+            <a:srgbClr val="954F72"/>
+          </p15:clr>
+        </p15:guide>
+        <p15:guide id="32" orient="horz" pos="1440">
+          <p15:clr>
+            <a:srgbClr val="954F72"/>
+          </p15:clr>
+        </p15:guide>
+        <p15:guide id="33" orient="horz" pos="1624">
+          <p15:clr>
+            <a:srgbClr val="954F72"/>
+          </p15:clr>
+        </p15:guide>
+        <p15:guide id="34" orient="horz" pos="2067">
+          <p15:clr>
+            <a:srgbClr val="954F72"/>
+          </p15:clr>
+        </p15:guide>
+        <p15:guide id="35" orient="horz" pos="2252">
+          <p15:clr>
+            <a:srgbClr val="954F72"/>
+          </p15:clr>
+        </p15:guide>
+        <p15:guide id="36" orient="horz" pos="2695">
+          <p15:clr>
+            <a:srgbClr val="954F72"/>
+          </p15:clr>
+        </p15:guide>
+        <p15:guide id="37" orient="horz" pos="2880">
+          <p15:clr>
+            <a:srgbClr val="954F72"/>
+          </p15:clr>
+        </p15:guide>
+        <p15:guide id="38" orient="horz" pos="3323">
+          <p15:clr>
+            <a:srgbClr val="954F72"/>
+          </p15:clr>
+        </p15:guide>
+        <p15:guide id="39" orient="horz" pos="3507">
+          <p15:clr>
+            <a:srgbClr val="954F72"/>
+          </p15:clr>
+        </p15:guide>
+      </p15:sldGuideLst>
+    </p:ext>
+  </p:extLst>
+</p:sldLayout>
+</file>
+
+<file path=ppt/slideLayouts/slideLayout39.xml><?xml version="1.0" encoding="utf-8"?>
+<p:sldLayout xmlns:a="http://schemas.openxmlformats.org/drawingml/2006/main" xmlns:r="http://schemas.openxmlformats.org/officeDocument/2006/relationships" xmlns:p="http://schemas.openxmlformats.org/presentationml/2006/main" userDrawn="1">
+  <p:cSld name="Blank_with Head">
+    <p:spTree>
+      <p:nvGrpSpPr>
+        <p:cNvPr id="1" name=""/>
+        <p:cNvGrpSpPr/>
+        <p:nvPr/>
+      </p:nvGrpSpPr>
+      <p:grpSpPr>
+        <a:xfrm>
+          <a:off x="0" y="0"/>
+          <a:ext cx="0" cy="0"/>
+          <a:chOff x="0" y="0"/>
+          <a:chExt cx="0" cy="0"/>
+        </a:xfrm>
+      </p:grpSpPr>
+      <p:sp>
+        <p:nvSpPr>
+          <p:cNvPr id="2" name="Title 1">
+            <a:extLst>
+              <a:ext uri="{FF2B5EF4-FFF2-40B4-BE49-F238E27FC236}">
+                <a16:creationId xmlns:a16="http://schemas.microsoft.com/office/drawing/2014/main" id="{BCE35D3C-86EE-875E-D2A6-669DF7E1C19A}"/>
+              </a:ext>
+            </a:extLst>
+          </p:cNvPr>
+          <p:cNvSpPr>
+            <a:spLocks noGrp="1"/>
+          </p:cNvSpPr>
+          <p:nvPr>
+            <p:ph type="title"/>
+          </p:nvPr>
+        </p:nvSpPr>
+        <p:spPr>
+          <a:xfrm>
+            <a:off x="588262" y="585216"/>
+            <a:ext cx="8193024" cy="492443"/>
+          </a:xfrm>
+        </p:spPr>
+        <p:txBody>
+          <a:bodyPr/>
+          <a:lstStyle>
+            <a:lvl1pPr>
+              <a:defRPr sz="3200" b="0" i="0">
+                <a:solidFill>
+                  <a:schemeClr val="tx1"/>
+                </a:solidFill>
+                <a:latin typeface="+mj-lt"/>
+                <a:cs typeface="Segoe UI Semibold" panose="020B0502040204020203" pitchFamily="34" charset="0"/>
+              </a:defRPr>
+            </a:lvl1pPr>
+          </a:lstStyle>
+          <a:p>
+            <a:r>
+              <a:rPr lang="en-US"/>
+              <a:t>Click to edit Master title style</a:t>
+            </a:r>
+            <a:endParaRPr lang="en-US" dirty="0"/>
+          </a:p>
+        </p:txBody>
+      </p:sp>
+      <p:sp>
+        <p:nvSpPr>
+          <p:cNvPr id="5" name="Footer Placeholder 10">
+            <a:extLst>
+              <a:ext uri="{FF2B5EF4-FFF2-40B4-BE49-F238E27FC236}">
+                <a16:creationId xmlns:a16="http://schemas.microsoft.com/office/drawing/2014/main" id="{AE09A77D-BE61-2556-4E7D-60B0A94FD88A}"/>
+              </a:ext>
+            </a:extLst>
+          </p:cNvPr>
+          <p:cNvSpPr>
+            <a:spLocks noGrp="1"/>
+          </p:cNvSpPr>
+          <p:nvPr>
+            <p:ph type="ftr" sz="quarter" idx="3"/>
+          </p:nvPr>
+        </p:nvSpPr>
+        <p:spPr>
+          <a:xfrm>
+            <a:off x="579438" y="6421083"/>
+            <a:ext cx="4151312" cy="197976"/>
+          </a:xfrm>
+          <a:prstGeom prst="rect">
+            <a:avLst/>
+          </a:prstGeom>
+        </p:spPr>
+        <p:txBody>
+          <a:bodyPr vert="horz" lIns="0" tIns="0" rIns="0" bIns="0" rtlCol="0" anchor="ctr"/>
+          <a:lstStyle>
+            <a:lvl1pPr marL="0" algn="l" defTabSz="914400" rtl="0" eaLnBrk="1" latinLnBrk="0" hangingPunct="1">
+              <a:defRPr lang="en-US" sz="1000" kern="1200" dirty="0">
+                <a:solidFill>
+                  <a:schemeClr val="tx1"/>
+                </a:solidFill>
+                <a:latin typeface="+mn-lt"/>
+                <a:ea typeface="+mn-ea"/>
+                <a:cs typeface="+mn-cs"/>
+              </a:defRPr>
+            </a:lvl1pPr>
+            <a:lvl5pPr>
+              <a:defRPr lang="en-US" sz="750" kern="100" cap="all" spc="0" baseline="0" dirty="0">
+                <a:solidFill>
+                  <a:schemeClr val="tx1"/>
+                </a:solidFill>
+                <a:latin typeface="Arial" panose="020B0604020202020204" pitchFamily="34" charset="0"/>
+                <a:ea typeface="+mn-ea"/>
+                <a:cs typeface="Arial" panose="020B0604020202020204" pitchFamily="34" charset="0"/>
+              </a:defRPr>
+            </a:lvl5pPr>
+          </a:lstStyle>
+          <a:p>
+            <a:pPr defTabSz="914367">
+              <a:defRPr/>
+            </a:pPr>
+            <a:r>
+              <a:rPr lang="en-US">
+                <a:solidFill>
+                  <a:srgbClr val="000000"/>
+                </a:solidFill>
+              </a:rPr>
+              <a:t>© Copyright Microsoft Corporation. All rights reserved.</a:t>
+            </a:r>
+            <a:endParaRPr lang="en-US" dirty="0">
+              <a:solidFill>
+                <a:srgbClr val="000000"/>
+              </a:solidFill>
+            </a:endParaRPr>
+          </a:p>
+        </p:txBody>
+      </p:sp>
+    </p:spTree>
+    <p:extLst>
+      <p:ext uri="{BB962C8B-B14F-4D97-AF65-F5344CB8AC3E}">
+        <p14:creationId xmlns:p14="http://schemas.microsoft.com/office/powerpoint/2010/main" val="3699916603"/>
+      </p:ext>
+    </p:extLst>
+  </p:cSld>
+  <p:clrMapOvr>
+    <a:masterClrMapping/>
+  </p:clrMapOvr>
+  <p:transition>
+    <p:fade/>
+  </p:transition>
+  <p:extLst>
+    <p:ext uri="{DCECCB84-F9BA-43D5-87BE-67443E8EF086}">
+      <p15:sldGuideLst xmlns:p15="http://schemas.microsoft.com/office/powerpoint/2012/main">
+        <p15:guide id="4" pos="778">
+          <p15:clr>
+            <a:srgbClr val="954F72"/>
+          </p15:clr>
+        </p15:guide>
+        <p15:guide id="5" pos="962">
+          <p15:clr>
+            <a:srgbClr val="954F72"/>
+          </p15:clr>
+        </p15:guide>
+        <p15:guide id="6" pos="1372">
+          <p15:clr>
+            <a:srgbClr val="954F72"/>
+          </p15:clr>
+        </p15:guide>
+        <p15:guide id="7" pos="1556">
+          <p15:clr>
+            <a:srgbClr val="954F72"/>
+          </p15:clr>
+        </p15:guide>
+        <p15:guide id="8" pos="1966">
+          <p15:clr>
+            <a:srgbClr val="954F72"/>
+          </p15:clr>
+        </p15:guide>
+        <p15:guide id="9" pos="2150">
+          <p15:clr>
+            <a:srgbClr val="954F72"/>
+          </p15:clr>
+        </p15:guide>
+        <p15:guide id="10" pos="2560">
+          <p15:clr>
+            <a:srgbClr val="954F72"/>
+          </p15:clr>
+        </p15:guide>
+        <p15:guide id="11" pos="2744">
+          <p15:clr>
+            <a:srgbClr val="954F72"/>
+          </p15:clr>
+        </p15:guide>
+        <p15:guide id="12" pos="3153">
+          <p15:clr>
+            <a:srgbClr val="954F72"/>
+          </p15:clr>
+        </p15:guide>
+        <p15:guide id="13" pos="3338">
+          <p15:clr>
+            <a:srgbClr val="954F72"/>
+          </p15:clr>
+        </p15:guide>
+        <p15:guide id="14" pos="3747">
+          <p15:clr>
+            <a:srgbClr val="954F72"/>
+          </p15:clr>
+        </p15:guide>
+        <p15:guide id="15" pos="3932">
+          <p15:clr>
+            <a:srgbClr val="954F72"/>
+          </p15:clr>
+        </p15:guide>
+        <p15:guide id="16" pos="4341">
+          <p15:clr>
+            <a:srgbClr val="954F72"/>
+          </p15:clr>
+        </p15:guide>
+        <p15:guide id="17" pos="4526">
+          <p15:clr>
+            <a:srgbClr val="954F72"/>
+          </p15:clr>
+        </p15:guide>
+        <p15:guide id="18" pos="4935">
+          <p15:clr>
+            <a:srgbClr val="954F72"/>
+          </p15:clr>
+        </p15:guide>
+        <p15:guide id="19" pos="5120">
+          <p15:clr>
+            <a:srgbClr val="954F72"/>
+          </p15:clr>
+        </p15:guide>
+        <p15:guide id="20" pos="5529">
+          <p15:clr>
+            <a:srgbClr val="954F72"/>
+          </p15:clr>
+        </p15:guide>
+        <p15:guide id="21" pos="5713">
+          <p15:clr>
+            <a:srgbClr val="954F72"/>
+          </p15:clr>
+        </p15:guide>
+        <p15:guide id="22" pos="6123">
+          <p15:clr>
+            <a:srgbClr val="954F72"/>
+          </p15:clr>
+        </p15:guide>
+        <p15:guide id="23" pos="6307">
+          <p15:clr>
+            <a:srgbClr val="954F72"/>
+          </p15:clr>
+        </p15:guide>
+        <p15:guide id="24" pos="6717">
+          <p15:clr>
+            <a:srgbClr val="954F72"/>
+          </p15:clr>
+        </p15:guide>
+        <p15:guide id="25" pos="6901">
+          <p15:clr>
+            <a:srgbClr val="954F72"/>
+          </p15:clr>
+        </p15:guide>
+        <p15:guide id="30" orient="horz" pos="812">
+          <p15:clr>
+            <a:srgbClr val="954F72"/>
+          </p15:clr>
+        </p15:guide>
+        <p15:guide id="31" orient="horz" pos="996">
+          <p15:clr>
+            <a:srgbClr val="954F72"/>
+          </p15:clr>
+        </p15:guide>
+        <p15:guide id="32" orient="horz" pos="1440">
+          <p15:clr>
+            <a:srgbClr val="954F72"/>
+          </p15:clr>
+        </p15:guide>
+        <p15:guide id="33" orient="horz" pos="1624">
+          <p15:clr>
+            <a:srgbClr val="954F72"/>
+          </p15:clr>
+        </p15:guide>
+        <p15:guide id="34" orient="horz" pos="2067">
+          <p15:clr>
+            <a:srgbClr val="954F72"/>
+          </p15:clr>
+        </p15:guide>
+        <p15:guide id="35" orient="horz" pos="2252">
+          <p15:clr>
+            <a:srgbClr val="954F72"/>
+          </p15:clr>
+        </p15:guide>
+        <p15:guide id="36" orient="horz" pos="2695">
+          <p15:clr>
+            <a:srgbClr val="954F72"/>
+          </p15:clr>
+        </p15:guide>
+        <p15:guide id="37" orient="horz" pos="2880">
+          <p15:clr>
+            <a:srgbClr val="954F72"/>
+          </p15:clr>
+        </p15:guide>
+        <p15:guide id="38" orient="horz" pos="3323">
+          <p15:clr>
+            <a:srgbClr val="954F72"/>
+          </p15:clr>
+        </p15:guide>
+        <p15:guide id="39" orient="horz" pos="3507">
+          <p15:clr>
+            <a:srgbClr val="954F72"/>
+          </p15:clr>
+        </p15:guide>
+      </p15:sldGuideLst>
+    </p:ext>
+  </p:extLst>
+</p:sldLayout>
+</file>
+
 <file path=ppt/slideLayouts/slideLayout4.xml><?xml version="1.0" encoding="utf-8"?>
 <p:sldLayout xmlns:a="http://schemas.openxmlformats.org/drawingml/2006/main" xmlns:r="http://schemas.openxmlformats.org/officeDocument/2006/relationships" xmlns:p="http://schemas.openxmlformats.org/presentationml/2006/main" showMasterSp="0" preserve="1" userDrawn="1">
   <p:cSld name="Transition Blue">
@@ -18347,10 +19850,10 @@
           <p:nvPr userDrawn="1"/>
         </p:nvPicPr>
         <p:blipFill rotWithShape="1">
-          <a:blip r:embed="rId39">
+          <a:blip r:embed="rId41">
             <a:extLst>
               <a:ext uri="{96DAC541-7B7A-43D3-8B79-37D633B846F1}">
-                <asvg:svgBlip xmlns:asvg="http://schemas.microsoft.com/office/drawing/2016/SVG/main" r:embed="rId40"/>
+                <asvg:svgBlip xmlns:asvg="http://schemas.microsoft.com/office/drawing/2016/SVG/main" r:embed="rId42"/>
               </a:ext>
             </a:extLst>
           </a:blip>
@@ -18532,10 +20035,10 @@
           <p:nvPr userDrawn="1"/>
         </p:nvPicPr>
         <p:blipFill>
-          <a:blip r:embed="rId41">
+          <a:blip r:embed="rId43">
             <a:extLst>
               <a:ext uri="{96DAC541-7B7A-43D3-8B79-37D633B846F1}">
-                <asvg:svgBlip xmlns:asvg="http://schemas.microsoft.com/office/drawing/2016/SVG/main" r:embed="rId42"/>
+                <asvg:svgBlip xmlns:asvg="http://schemas.microsoft.com/office/drawing/2016/SVG/main" r:embed="rId44"/>
               </a:ext>
             </a:extLst>
           </a:blip>
@@ -18599,6 +20102,8 @@
     <p:sldLayoutId id="2147483664" r:id="rId35"/>
     <p:sldLayoutId id="2147483655" r:id="rId36"/>
     <p:sldLayoutId id="2147483689" r:id="rId37"/>
+    <p:sldLayoutId id="2147483691" r:id="rId38"/>
+    <p:sldLayoutId id="2147483692" r:id="rId39"/>
   </p:sldLayoutIdLst>
   <p:hf hdr="0" dt="0"/>
   <p:txStyles>
@@ -19510,6 +21015,1581 @@
       </p:grpSpPr>
       <p:sp>
         <p:nvSpPr>
+          <p:cNvPr id="4" name="Title 3">
+            <a:extLst>
+              <a:ext uri="{FF2B5EF4-FFF2-40B4-BE49-F238E27FC236}">
+                <a16:creationId xmlns:a16="http://schemas.microsoft.com/office/drawing/2014/main" id="{445E0278-3EFF-CBEC-7334-AD604D1E7D55}"/>
+              </a:ext>
+            </a:extLst>
+          </p:cNvPr>
+          <p:cNvSpPr>
+            <a:spLocks noGrp="1"/>
+          </p:cNvSpPr>
+          <p:nvPr>
+            <p:ph type="title"/>
+          </p:nvPr>
+        </p:nvSpPr>
+        <p:spPr/>
+        <p:txBody>
+          <a:bodyPr>
+            <a:normAutofit fontScale="90000"/>
+          </a:bodyPr>
+          <a:lstStyle/>
+          <a:p>
+            <a:r>
+              <a:rPr lang="en-US" dirty="0">
+                <a:solidFill>
+                  <a:schemeClr val="tx2"/>
+                </a:solidFill>
+              </a:rPr>
+              <a:t>Lake database concepts</a:t>
+            </a:r>
+          </a:p>
+        </p:txBody>
+      </p:sp>
+      <p:sp>
+        <p:nvSpPr>
+          <p:cNvPr id="3" name="Text Placeholder 2">
+            <a:extLst>
+              <a:ext uri="{FF2B5EF4-FFF2-40B4-BE49-F238E27FC236}">
+                <a16:creationId xmlns:a16="http://schemas.microsoft.com/office/drawing/2014/main" id="{43867D71-2086-64E8-6375-6222CABD60E1}"/>
+              </a:ext>
+            </a:extLst>
+          </p:cNvPr>
+          <p:cNvSpPr>
+            <a:spLocks noGrp="1"/>
+          </p:cNvSpPr>
+          <p:nvPr>
+            <p:ph type="body" sz="quarter" idx="16"/>
+          </p:nvPr>
+        </p:nvSpPr>
+        <p:spPr>
+          <a:xfrm>
+            <a:off x="584200" y="1594155"/>
+            <a:ext cx="3174143" cy="4462760"/>
+          </a:xfrm>
+        </p:spPr>
+        <p:txBody>
+          <a:bodyPr>
+            <a:normAutofit fontScale="92500" lnSpcReduction="20000"/>
+          </a:bodyPr>
+          <a:lstStyle/>
+          <a:p>
+            <a:pPr marL="0" lvl="1" indent="0">
+              <a:spcBef>
+                <a:spcPts val="1200"/>
+              </a:spcBef>
+              <a:buNone/>
+            </a:pPr>
+            <a:r>
+              <a:rPr lang="en-US" sz="1800" dirty="0">
+                <a:latin typeface="+mj-lt"/>
+                <a:cs typeface="Segoe UI" panose="020B0502040204020203" pitchFamily="34" charset="0"/>
+              </a:rPr>
+              <a:t>Lake database schema:</a:t>
+            </a:r>
+          </a:p>
+          <a:p>
+            <a:pPr marL="304800" lvl="1" indent="-190500">
+              <a:spcBef>
+                <a:spcPts val="300"/>
+              </a:spcBef>
+              <a:defRPr/>
+            </a:pPr>
+            <a:r>
+              <a:rPr lang="en-US" sz="1600" dirty="0"/>
+              <a:t>Relational tables</a:t>
+            </a:r>
+          </a:p>
+          <a:p>
+            <a:pPr marL="304800" lvl="1" indent="-190500">
+              <a:spcBef>
+                <a:spcPts val="600"/>
+              </a:spcBef>
+              <a:defRPr/>
+            </a:pPr>
+            <a:r>
+              <a:rPr lang="en-US" sz="1600" dirty="0"/>
+              <a:t>Proven data modeling principles</a:t>
+            </a:r>
+          </a:p>
+          <a:p>
+            <a:pPr marL="304800" lvl="1" indent="-190500">
+              <a:spcBef>
+                <a:spcPts val="600"/>
+              </a:spcBef>
+              <a:defRPr/>
+            </a:pPr>
+            <a:r>
+              <a:rPr lang="en-US" sz="1600" dirty="0"/>
+              <a:t>Consistent naming conventions</a:t>
+            </a:r>
+          </a:p>
+          <a:p>
+            <a:pPr marL="0" lvl="1" indent="0">
+              <a:spcBef>
+                <a:spcPts val="1200"/>
+              </a:spcBef>
+              <a:buNone/>
+            </a:pPr>
+            <a:r>
+              <a:rPr lang="en-US" sz="1800" dirty="0">
+                <a:latin typeface="+mj-lt"/>
+                <a:cs typeface="Segoe UI" panose="020B0502040204020203" pitchFamily="34" charset="0"/>
+              </a:rPr>
+              <a:t>Lake database storage:</a:t>
+            </a:r>
+          </a:p>
+          <a:p>
+            <a:pPr marL="304800" lvl="1" indent="-190500">
+              <a:spcBef>
+                <a:spcPts val="300"/>
+              </a:spcBef>
+              <a:defRPr/>
+            </a:pPr>
+            <a:r>
+              <a:rPr lang="en-US" sz="1600" dirty="0"/>
+              <a:t>Parquet or CSV files in a</a:t>
+            </a:r>
+            <a:br>
+              <a:rPr lang="en-US" sz="1600" dirty="0"/>
+            </a:br>
+            <a:r>
+              <a:rPr lang="en-US" sz="1600" dirty="0"/>
+              <a:t>data lake</a:t>
+            </a:r>
+          </a:p>
+          <a:p>
+            <a:pPr marL="304800" lvl="1" indent="-190500">
+              <a:spcBef>
+                <a:spcPts val="600"/>
+              </a:spcBef>
+              <a:defRPr/>
+            </a:pPr>
+            <a:r>
+              <a:rPr lang="en-US" sz="1600" dirty="0"/>
+              <a:t>Managed independently</a:t>
+            </a:r>
+            <a:br>
+              <a:rPr lang="en-US" sz="1600" dirty="0"/>
+            </a:br>
+            <a:r>
+              <a:rPr lang="en-US" sz="1600" dirty="0"/>
+              <a:t>of database</a:t>
+            </a:r>
+          </a:p>
+          <a:p>
+            <a:pPr marL="304800" lvl="1" indent="-190500">
+              <a:spcBef>
+                <a:spcPts val="600"/>
+              </a:spcBef>
+              <a:defRPr/>
+            </a:pPr>
+            <a:r>
+              <a:rPr lang="en-US" sz="1600" dirty="0"/>
+              <a:t>Simplified data ingestion</a:t>
+            </a:r>
+          </a:p>
+          <a:p>
+            <a:pPr marL="0" lvl="1" indent="0">
+              <a:spcBef>
+                <a:spcPts val="1200"/>
+              </a:spcBef>
+              <a:buNone/>
+            </a:pPr>
+            <a:r>
+              <a:rPr lang="en-US" sz="1800" dirty="0">
+                <a:latin typeface="+mj-lt"/>
+                <a:cs typeface="Segoe UI" panose="020B0502040204020203" pitchFamily="34" charset="0"/>
+              </a:rPr>
+              <a:t>Lake database compute:</a:t>
+            </a:r>
+          </a:p>
+          <a:p>
+            <a:pPr marL="304800" lvl="1" indent="-190500">
+              <a:spcBef>
+                <a:spcPts val="300"/>
+              </a:spcBef>
+              <a:defRPr/>
+            </a:pPr>
+            <a:r>
+              <a:rPr lang="en-US" sz="1600" dirty="0"/>
+              <a:t>Serverless SQL pool</a:t>
+            </a:r>
+          </a:p>
+          <a:p>
+            <a:pPr marL="304800" lvl="1" indent="-190500">
+              <a:spcBef>
+                <a:spcPts val="600"/>
+              </a:spcBef>
+              <a:defRPr/>
+            </a:pPr>
+            <a:r>
+              <a:rPr lang="en-US" sz="1600" dirty="0"/>
+              <a:t>Apache Spark pool</a:t>
+            </a:r>
+          </a:p>
+        </p:txBody>
+      </p:sp>
+      <p:sp>
+        <p:nvSpPr>
+          <p:cNvPr id="7" name="Rectangle 6">
+            <a:extLst>
+              <a:ext uri="{FF2B5EF4-FFF2-40B4-BE49-F238E27FC236}">
+                <a16:creationId xmlns:a16="http://schemas.microsoft.com/office/drawing/2014/main" id="{801B3925-7829-B76B-8C19-A892BB36C4AD}"/>
+              </a:ext>
+              <a:ext uri="{C183D7F6-B498-43B3-948B-1728B52AA6E4}">
+                <adec:decorative xmlns:adec="http://schemas.microsoft.com/office/drawing/2017/decorative" val="1"/>
+              </a:ext>
+            </a:extLst>
+          </p:cNvPr>
+          <p:cNvSpPr>
+            <a:spLocks/>
+          </p:cNvSpPr>
+          <p:nvPr/>
+        </p:nvSpPr>
+        <p:spPr bwMode="auto">
+          <a:xfrm>
+            <a:off x="4064000" y="1581150"/>
+            <a:ext cx="7535862" cy="4430720"/>
+          </a:xfrm>
+          <a:prstGeom prst="rect">
+            <a:avLst/>
+          </a:prstGeom>
+          <a:solidFill>
+            <a:schemeClr val="bg1"/>
+          </a:solidFill>
+          <a:ln w="19050">
+            <a:solidFill>
+              <a:schemeClr val="accent4"/>
+            </a:solidFill>
+            <a:headEnd type="none" w="med" len="med"/>
+            <a:tailEnd type="none" w="med" len="med"/>
+          </a:ln>
+          <a:effectLst/>
+        </p:spPr>
+        <p:style>
+          <a:lnRef idx="1">
+            <a:schemeClr val="accent2"/>
+          </a:lnRef>
+          <a:fillRef idx="3">
+            <a:schemeClr val="accent2"/>
+          </a:fillRef>
+          <a:effectRef idx="2">
+            <a:schemeClr val="accent2"/>
+          </a:effectRef>
+          <a:fontRef idx="minor">
+            <a:schemeClr val="lt1"/>
+          </a:fontRef>
+        </p:style>
+        <p:txBody>
+          <a:bodyPr rot="0" spcFirstLastPara="0" vertOverflow="overflow" horzOverflow="overflow" vert="horz" wrap="square" lIns="182880" tIns="146304" rIns="182880" bIns="146304" numCol="1" spcCol="0" rtlCol="0" fromWordArt="0" anchor="t" anchorCtr="0" forceAA="0" compatLnSpc="1">
+            <a:prstTxWarp prst="textNoShape">
+              <a:avLst/>
+            </a:prstTxWarp>
+            <a:noAutofit/>
+          </a:bodyPr>
+          <a:lstStyle/>
+          <a:p>
+            <a:pPr algn="l" defTabSz="932472" fontAlgn="base">
+              <a:spcBef>
+                <a:spcPct val="0"/>
+              </a:spcBef>
+              <a:spcAft>
+                <a:spcPct val="0"/>
+              </a:spcAft>
+            </a:pPr>
+            <a:endParaRPr lang="en-IN" sz="2400" dirty="0" err="1">
+              <a:gradFill>
+                <a:gsLst>
+                  <a:gs pos="0">
+                    <a:srgbClr val="FFFFFF"/>
+                  </a:gs>
+                  <a:gs pos="100000">
+                    <a:srgbClr val="FFFFFF"/>
+                  </a:gs>
+                </a:gsLst>
+                <a:lin ang="5400000" scaled="0"/>
+              </a:gradFill>
+              <a:ea typeface="Segoe UI" pitchFamily="34" charset="0"/>
+              <a:cs typeface="Segoe UI" pitchFamily="34" charset="0"/>
+            </a:endParaRPr>
+          </a:p>
+        </p:txBody>
+      </p:sp>
+      <p:pic>
+        <p:nvPicPr>
+          <p:cNvPr id="3074" name="Picture 2" descr="Diagram of a relational schema of linked tables overlaying files in a file store.">
+            <a:extLst>
+              <a:ext uri="{FF2B5EF4-FFF2-40B4-BE49-F238E27FC236}">
+                <a16:creationId xmlns:a16="http://schemas.microsoft.com/office/drawing/2014/main" id="{0A028CD4-6AE0-27B0-A96C-2935726EAAA8}"/>
+              </a:ext>
+            </a:extLst>
+          </p:cNvPr>
+          <p:cNvPicPr>
+            <a:picLocks noChangeAspect="1" noChangeArrowheads="1"/>
+          </p:cNvPicPr>
+          <p:nvPr/>
+        </p:nvPicPr>
+        <p:blipFill>
+          <a:blip r:embed="rId3">
+            <a:extLst>
+              <a:ext uri="{28A0092B-C50C-407E-A947-70E740481C1C}">
+                <a14:useLocalDpi xmlns:a14="http://schemas.microsoft.com/office/drawing/2010/main" val="0"/>
+              </a:ext>
+            </a:extLst>
+          </a:blip>
+          <a:srcRect/>
+          <a:stretch>
+            <a:fillRect/>
+          </a:stretch>
+        </p:blipFill>
+        <p:spPr bwMode="auto">
+          <a:xfrm>
+            <a:off x="5875686" y="1717265"/>
+            <a:ext cx="3912490" cy="3286492"/>
+          </a:xfrm>
+          <a:prstGeom prst="rect">
+            <a:avLst/>
+          </a:prstGeom>
+          <a:noFill/>
+          <a:extLst>
+            <a:ext uri="{909E8E84-426E-40DD-AFC4-6F175D3DCCD1}">
+              <a14:hiddenFill xmlns:a14="http://schemas.microsoft.com/office/drawing/2010/main">
+                <a:solidFill>
+                  <a:srgbClr val="FFFFFF"/>
+                </a:solidFill>
+              </a14:hiddenFill>
+            </a:ext>
+          </a:extLst>
+        </p:spPr>
+      </p:pic>
+      <p:pic>
+        <p:nvPicPr>
+          <p:cNvPr id="12" name="Graphic 11" descr="SQL Pool">
+            <a:extLst>
+              <a:ext uri="{FF2B5EF4-FFF2-40B4-BE49-F238E27FC236}">
+                <a16:creationId xmlns:a16="http://schemas.microsoft.com/office/drawing/2014/main" id="{B71BC256-DBD0-1715-6D4B-C3C1A233F491}"/>
+              </a:ext>
+            </a:extLst>
+          </p:cNvPr>
+          <p:cNvPicPr>
+            <a:picLocks noChangeAspect="1"/>
+          </p:cNvPicPr>
+          <p:nvPr/>
+        </p:nvPicPr>
+        <p:blipFill>
+          <a:blip r:embed="rId4">
+            <a:extLst>
+              <a:ext uri="{96DAC541-7B7A-43D3-8B79-37D633B846F1}">
+                <asvg:svgBlip xmlns:asvg="http://schemas.microsoft.com/office/drawing/2016/SVG/main" r:embed="rId5"/>
+              </a:ext>
+            </a:extLst>
+          </a:blip>
+          <a:stretch>
+            <a:fillRect/>
+          </a:stretch>
+        </p:blipFill>
+        <p:spPr>
+          <a:xfrm>
+            <a:off x="5875686" y="5221711"/>
+            <a:ext cx="628361" cy="628361"/>
+          </a:xfrm>
+          <a:prstGeom prst="rect">
+            <a:avLst/>
+          </a:prstGeom>
+        </p:spPr>
+      </p:pic>
+      <p:pic>
+        <p:nvPicPr>
+          <p:cNvPr id="14" name="Picture 13" descr="Spark Pool">
+            <a:extLst>
+              <a:ext uri="{FF2B5EF4-FFF2-40B4-BE49-F238E27FC236}">
+                <a16:creationId xmlns:a16="http://schemas.microsoft.com/office/drawing/2014/main" id="{86F0E7F5-0518-CE4E-1622-ED76C5A8DAE0}"/>
+              </a:ext>
+            </a:extLst>
+          </p:cNvPr>
+          <p:cNvPicPr>
+            <a:picLocks noChangeAspect="1"/>
+          </p:cNvPicPr>
+          <p:nvPr/>
+        </p:nvPicPr>
+        <p:blipFill>
+          <a:blip r:embed="rId6"/>
+          <a:stretch>
+            <a:fillRect/>
+          </a:stretch>
+        </p:blipFill>
+        <p:spPr>
+          <a:xfrm>
+            <a:off x="8748648" y="5221711"/>
+            <a:ext cx="1039528" cy="736979"/>
+          </a:xfrm>
+          <a:prstGeom prst="rect">
+            <a:avLst/>
+          </a:prstGeom>
+        </p:spPr>
+      </p:pic>
+      <p:sp>
+        <p:nvSpPr>
+          <p:cNvPr id="15" name="Left Brace 14">
+            <a:extLst>
+              <a:ext uri="{FF2B5EF4-FFF2-40B4-BE49-F238E27FC236}">
+                <a16:creationId xmlns:a16="http://schemas.microsoft.com/office/drawing/2014/main" id="{EFA79B00-038E-53B2-3FB2-A275193667A5}"/>
+              </a:ext>
+              <a:ext uri="{C183D7F6-B498-43B3-948B-1728B52AA6E4}">
+                <adec:decorative xmlns:adec="http://schemas.microsoft.com/office/drawing/2017/decorative" val="1"/>
+              </a:ext>
+            </a:extLst>
+          </p:cNvPr>
+          <p:cNvSpPr/>
+          <p:nvPr/>
+        </p:nvSpPr>
+        <p:spPr>
+          <a:xfrm rot="5400000">
+            <a:off x="7622725" y="3570897"/>
+            <a:ext cx="217954" cy="3083674"/>
+          </a:xfrm>
+          <a:prstGeom prst="leftBrace">
+            <a:avLst>
+              <a:gd name="adj1" fmla="val 0"/>
+              <a:gd name="adj2" fmla="val 51977"/>
+            </a:avLst>
+          </a:prstGeom>
+          <a:ln w="19050">
+            <a:solidFill>
+              <a:schemeClr val="bg1">
+                <a:lumMod val="75000"/>
+              </a:schemeClr>
+            </a:solidFill>
+            <a:headEnd type="none"/>
+            <a:tailEnd type="none"/>
+          </a:ln>
+        </p:spPr>
+        <p:style>
+          <a:lnRef idx="1">
+            <a:schemeClr val="accent1"/>
+          </a:lnRef>
+          <a:fillRef idx="0">
+            <a:schemeClr val="accent1"/>
+          </a:fillRef>
+          <a:effectRef idx="0">
+            <a:schemeClr val="accent1"/>
+          </a:effectRef>
+          <a:fontRef idx="minor">
+            <a:schemeClr val="tx1"/>
+          </a:fontRef>
+        </p:style>
+        <p:txBody>
+          <a:bodyPr rtlCol="0" anchor="ctr"/>
+          <a:lstStyle/>
+          <a:p>
+            <a:pPr algn="ctr"/>
+            <a:endParaRPr lang="en-US" dirty="0"/>
+          </a:p>
+        </p:txBody>
+      </p:sp>
+    </p:spTree>
+    <p:extLst>
+      <p:ext uri="{BB962C8B-B14F-4D97-AF65-F5344CB8AC3E}">
+        <p14:creationId xmlns:p14="http://schemas.microsoft.com/office/powerpoint/2010/main" val="4109765492"/>
+      </p:ext>
+    </p:extLst>
+  </p:cSld>
+  <p:clrMapOvr>
+    <a:masterClrMapping/>
+  </p:clrMapOvr>
+  <p:transition>
+    <p:fade/>
+  </p:transition>
+</p:sld>
+</file>
+
+<file path=ppt/slides/slide5.xml><?xml version="1.0" encoding="utf-8"?>
+<p:sld xmlns:a="http://schemas.openxmlformats.org/drawingml/2006/main" xmlns:r="http://schemas.openxmlformats.org/officeDocument/2006/relationships" xmlns:p="http://schemas.openxmlformats.org/presentationml/2006/main">
+  <p:cSld>
+    <p:spTree>
+      <p:nvGrpSpPr>
+        <p:cNvPr id="1" name=""/>
+        <p:cNvGrpSpPr/>
+        <p:nvPr/>
+      </p:nvGrpSpPr>
+      <p:grpSpPr>
+        <a:xfrm>
+          <a:off x="0" y="0"/>
+          <a:ext cx="0" cy="0"/>
+          <a:chOff x="0" y="0"/>
+          <a:chExt cx="0" cy="0"/>
+        </a:xfrm>
+      </p:grpSpPr>
+      <p:sp>
+        <p:nvSpPr>
+          <p:cNvPr id="2" name="Title 1">
+            <a:extLst>
+              <a:ext uri="{FF2B5EF4-FFF2-40B4-BE49-F238E27FC236}">
+                <a16:creationId xmlns:a16="http://schemas.microsoft.com/office/drawing/2014/main" id="{3756E13A-93D7-D4E2-1191-323DA43B6C9D}"/>
+              </a:ext>
+            </a:extLst>
+          </p:cNvPr>
+          <p:cNvSpPr>
+            <a:spLocks noGrp="1"/>
+          </p:cNvSpPr>
+          <p:nvPr>
+            <p:ph type="title"/>
+          </p:nvPr>
+        </p:nvSpPr>
+        <p:spPr>
+          <a:xfrm>
+            <a:off x="588262" y="585216"/>
+            <a:ext cx="11044938" cy="369332"/>
+          </a:xfrm>
+        </p:spPr>
+        <p:txBody>
+          <a:bodyPr>
+            <a:normAutofit fontScale="90000"/>
+          </a:bodyPr>
+          <a:lstStyle/>
+          <a:p>
+            <a:r>
+              <a:rPr lang="en-US" dirty="0">
+                <a:solidFill>
+                  <a:schemeClr val="tx2"/>
+                </a:solidFill>
+              </a:rPr>
+              <a:t>Database templates</a:t>
+            </a:r>
+          </a:p>
+        </p:txBody>
+      </p:sp>
+      <p:sp>
+        <p:nvSpPr>
+          <p:cNvPr id="8" name="Text Placeholder 7">
+            <a:extLst>
+              <a:ext uri="{FF2B5EF4-FFF2-40B4-BE49-F238E27FC236}">
+                <a16:creationId xmlns:a16="http://schemas.microsoft.com/office/drawing/2014/main" id="{24BF03AD-D6C4-1973-3018-C502151F8414}"/>
+              </a:ext>
+            </a:extLst>
+          </p:cNvPr>
+          <p:cNvSpPr>
+            <a:spLocks noGrp="1"/>
+          </p:cNvSpPr>
+          <p:nvPr>
+            <p:ph type="body" sz="quarter" idx="15"/>
+          </p:nvPr>
+        </p:nvSpPr>
+        <p:spPr>
+          <a:xfrm>
+            <a:off x="586389" y="1581150"/>
+            <a:ext cx="3172811" cy="2092881"/>
+          </a:xfrm>
+        </p:spPr>
+        <p:txBody>
+          <a:bodyPr/>
+          <a:lstStyle/>
+          <a:p>
+            <a:pPr marL="215900" lvl="1" indent="-215900">
+              <a:spcBef>
+                <a:spcPts val="1200"/>
+              </a:spcBef>
+            </a:pPr>
+            <a:r>
+              <a:rPr lang="en-US" sz="1800" dirty="0"/>
+              <a:t>Pre-defined relational schema based on common business scenarios</a:t>
+            </a:r>
+          </a:p>
+          <a:p>
+            <a:pPr marL="215900" lvl="1" indent="-215900">
+              <a:spcBef>
+                <a:spcPts val="1200"/>
+              </a:spcBef>
+            </a:pPr>
+            <a:r>
+              <a:rPr lang="en-US" sz="1800" dirty="0"/>
+              <a:t>Use as a template for a new database or start with a blank schema and add pre-defined table definitions</a:t>
+            </a:r>
+          </a:p>
+        </p:txBody>
+      </p:sp>
+      <p:sp>
+        <p:nvSpPr>
+          <p:cNvPr id="11" name="Rectangle 10">
+            <a:extLst>
+              <a:ext uri="{FF2B5EF4-FFF2-40B4-BE49-F238E27FC236}">
+                <a16:creationId xmlns:a16="http://schemas.microsoft.com/office/drawing/2014/main" id="{43FCDCB7-EA2A-9FB8-C358-0ABB6F25E843}"/>
+              </a:ext>
+              <a:ext uri="{C183D7F6-B498-43B3-948B-1728B52AA6E4}">
+                <adec:decorative xmlns:adec="http://schemas.microsoft.com/office/drawing/2017/decorative" val="1"/>
+              </a:ext>
+            </a:extLst>
+          </p:cNvPr>
+          <p:cNvSpPr>
+            <a:spLocks/>
+          </p:cNvSpPr>
+          <p:nvPr/>
+        </p:nvSpPr>
+        <p:spPr bwMode="auto">
+          <a:xfrm>
+            <a:off x="4064000" y="1581150"/>
+            <a:ext cx="7535862" cy="4430720"/>
+          </a:xfrm>
+          <a:prstGeom prst="rect">
+            <a:avLst/>
+          </a:prstGeom>
+          <a:solidFill>
+            <a:schemeClr val="bg1"/>
+          </a:solidFill>
+          <a:ln w="19050">
+            <a:solidFill>
+              <a:schemeClr val="accent4"/>
+            </a:solidFill>
+            <a:headEnd type="none" w="med" len="med"/>
+            <a:tailEnd type="none" w="med" len="med"/>
+          </a:ln>
+          <a:effectLst/>
+        </p:spPr>
+        <p:style>
+          <a:lnRef idx="1">
+            <a:schemeClr val="accent2"/>
+          </a:lnRef>
+          <a:fillRef idx="3">
+            <a:schemeClr val="accent2"/>
+          </a:fillRef>
+          <a:effectRef idx="2">
+            <a:schemeClr val="accent2"/>
+          </a:effectRef>
+          <a:fontRef idx="minor">
+            <a:schemeClr val="lt1"/>
+          </a:fontRef>
+        </p:style>
+        <p:txBody>
+          <a:bodyPr rot="0" spcFirstLastPara="0" vertOverflow="overflow" horzOverflow="overflow" vert="horz" wrap="square" lIns="182880" tIns="146304" rIns="182880" bIns="146304" numCol="1" spcCol="0" rtlCol="0" fromWordArt="0" anchor="t" anchorCtr="0" forceAA="0" compatLnSpc="1">
+            <a:prstTxWarp prst="textNoShape">
+              <a:avLst/>
+            </a:prstTxWarp>
+            <a:noAutofit/>
+          </a:bodyPr>
+          <a:lstStyle/>
+          <a:p>
+            <a:pPr algn="l" defTabSz="932472" fontAlgn="base">
+              <a:spcBef>
+                <a:spcPct val="0"/>
+              </a:spcBef>
+              <a:spcAft>
+                <a:spcPct val="0"/>
+              </a:spcAft>
+            </a:pPr>
+            <a:endParaRPr lang="en-IN" sz="2400" dirty="0" err="1">
+              <a:gradFill>
+                <a:gsLst>
+                  <a:gs pos="0">
+                    <a:srgbClr val="FFFFFF"/>
+                  </a:gs>
+                  <a:gs pos="100000">
+                    <a:srgbClr val="FFFFFF"/>
+                  </a:gs>
+                </a:gsLst>
+                <a:lin ang="5400000" scaled="0"/>
+              </a:gradFill>
+              <a:ea typeface="Segoe UI" pitchFamily="34" charset="0"/>
+              <a:cs typeface="Segoe UI" pitchFamily="34" charset="0"/>
+            </a:endParaRPr>
+          </a:p>
+        </p:txBody>
+      </p:sp>
+      <p:pic>
+        <p:nvPicPr>
+          <p:cNvPr id="4098" name="Picture 2" descr="Screenshot of the gallery in Azure Synapse Studio, showing database templates.">
+            <a:extLst>
+              <a:ext uri="{FF2B5EF4-FFF2-40B4-BE49-F238E27FC236}">
+                <a16:creationId xmlns:a16="http://schemas.microsoft.com/office/drawing/2014/main" id="{DCD7A910-3640-FE23-ACC9-D45ADD83279C}"/>
+              </a:ext>
+            </a:extLst>
+          </p:cNvPr>
+          <p:cNvPicPr>
+            <a:picLocks noChangeAspect="1" noChangeArrowheads="1"/>
+          </p:cNvPicPr>
+          <p:nvPr/>
+        </p:nvPicPr>
+        <p:blipFill rotWithShape="1">
+          <a:blip r:embed="rId3">
+            <a:extLst>
+              <a:ext uri="{28A0092B-C50C-407E-A947-70E740481C1C}">
+                <a14:useLocalDpi xmlns:a14="http://schemas.microsoft.com/office/drawing/2010/main" val="0"/>
+              </a:ext>
+            </a:extLst>
+          </a:blip>
+          <a:srcRect/>
+          <a:stretch/>
+        </p:blipFill>
+        <p:spPr bwMode="auto">
+          <a:xfrm>
+            <a:off x="5112698" y="1685706"/>
+            <a:ext cx="5438466" cy="4221608"/>
+          </a:xfrm>
+          <a:prstGeom prst="rect">
+            <a:avLst/>
+          </a:prstGeom>
+          <a:noFill/>
+          <a:extLst>
+            <a:ext uri="{909E8E84-426E-40DD-AFC4-6F175D3DCCD1}">
+              <a14:hiddenFill xmlns:a14="http://schemas.microsoft.com/office/drawing/2010/main">
+                <a:solidFill>
+                  <a:srgbClr val="FFFFFF"/>
+                </a:solidFill>
+              </a14:hiddenFill>
+            </a:ext>
+          </a:extLst>
+        </p:spPr>
+      </p:pic>
+    </p:spTree>
+    <p:extLst>
+      <p:ext uri="{BB962C8B-B14F-4D97-AF65-F5344CB8AC3E}">
+        <p14:creationId xmlns:p14="http://schemas.microsoft.com/office/powerpoint/2010/main" val="2285458829"/>
+      </p:ext>
+    </p:extLst>
+  </p:cSld>
+  <p:clrMapOvr>
+    <a:masterClrMapping/>
+  </p:clrMapOvr>
+  <p:transition>
+    <p:fade/>
+  </p:transition>
+</p:sld>
+</file>
+
+<file path=ppt/slides/slide6.xml><?xml version="1.0" encoding="utf-8"?>
+<p:sld xmlns:a="http://schemas.openxmlformats.org/drawingml/2006/main" xmlns:r="http://schemas.openxmlformats.org/officeDocument/2006/relationships" xmlns:p="http://schemas.openxmlformats.org/presentationml/2006/main">
+  <p:cSld>
+    <p:spTree>
+      <p:nvGrpSpPr>
+        <p:cNvPr id="1" name=""/>
+        <p:cNvGrpSpPr/>
+        <p:nvPr/>
+      </p:nvGrpSpPr>
+      <p:grpSpPr>
+        <a:xfrm>
+          <a:off x="0" y="0"/>
+          <a:ext cx="0" cy="0"/>
+          <a:chOff x="0" y="0"/>
+          <a:chExt cx="0" cy="0"/>
+        </a:xfrm>
+      </p:grpSpPr>
+      <p:sp>
+        <p:nvSpPr>
+          <p:cNvPr id="2" name="Title 1">
+            <a:extLst>
+              <a:ext uri="{FF2B5EF4-FFF2-40B4-BE49-F238E27FC236}">
+                <a16:creationId xmlns:a16="http://schemas.microsoft.com/office/drawing/2014/main" id="{33BDE757-0F09-94E2-E83C-768390602D44}"/>
+              </a:ext>
+            </a:extLst>
+          </p:cNvPr>
+          <p:cNvSpPr>
+            <a:spLocks noGrp="1"/>
+          </p:cNvSpPr>
+          <p:nvPr>
+            <p:ph type="title"/>
+          </p:nvPr>
+        </p:nvSpPr>
+        <p:spPr/>
+        <p:txBody>
+          <a:bodyPr>
+            <a:normAutofit fontScale="90000"/>
+          </a:bodyPr>
+          <a:lstStyle/>
+          <a:p>
+            <a:r>
+              <a:rPr lang="en-US" dirty="0">
+                <a:solidFill>
+                  <a:schemeClr val="tx2"/>
+                </a:solidFill>
+              </a:rPr>
+              <a:t>Database designer</a:t>
+            </a:r>
+          </a:p>
+        </p:txBody>
+      </p:sp>
+      <p:sp>
+        <p:nvSpPr>
+          <p:cNvPr id="3" name="Text Placeholder 2">
+            <a:extLst>
+              <a:ext uri="{FF2B5EF4-FFF2-40B4-BE49-F238E27FC236}">
+                <a16:creationId xmlns:a16="http://schemas.microsoft.com/office/drawing/2014/main" id="{FD41C0DB-CDC4-1609-E36B-80B92A80BA9F}"/>
+              </a:ext>
+            </a:extLst>
+          </p:cNvPr>
+          <p:cNvSpPr>
+            <a:spLocks noGrp="1"/>
+          </p:cNvSpPr>
+          <p:nvPr>
+            <p:ph type="body" sz="quarter" idx="15"/>
+          </p:nvPr>
+        </p:nvSpPr>
+        <p:spPr>
+          <a:xfrm>
+            <a:off x="586389" y="1581150"/>
+            <a:ext cx="3172811" cy="2939266"/>
+          </a:xfrm>
+        </p:spPr>
+        <p:txBody>
+          <a:bodyPr/>
+          <a:lstStyle/>
+          <a:p>
+            <a:pPr marL="228600" lvl="1" indent="-228600">
+              <a:spcBef>
+                <a:spcPts val="0"/>
+              </a:spcBef>
+              <a:spcAft>
+                <a:spcPts val="1200"/>
+              </a:spcAft>
+            </a:pPr>
+            <a:r>
+              <a:rPr lang="en-US" sz="1800" dirty="0"/>
+              <a:t>Visual tool for creating a database schema</a:t>
+            </a:r>
+          </a:p>
+          <a:p>
+            <a:pPr marL="228600" lvl="1" indent="-228600">
+              <a:spcBef>
+                <a:spcPts val="0"/>
+              </a:spcBef>
+              <a:spcAft>
+                <a:spcPts val="600"/>
+              </a:spcAft>
+            </a:pPr>
+            <a:r>
+              <a:rPr lang="en-US" sz="1800" dirty="0"/>
+              <a:t>Add tables and specify:</a:t>
+            </a:r>
+          </a:p>
+          <a:p>
+            <a:pPr marL="571500" lvl="1" indent="-228600" defTabSz="914367">
+              <a:spcBef>
+                <a:spcPts val="0"/>
+              </a:spcBef>
+              <a:spcAft>
+                <a:spcPts val="600"/>
+              </a:spcAft>
+              <a:buFont typeface="Segoe UI" panose="020B0502040204020203" pitchFamily="34" charset="0"/>
+              <a:buChar char="–"/>
+              <a:tabLst>
+                <a:tab pos="508000" algn="l"/>
+              </a:tabLst>
+            </a:pPr>
+            <a:r>
+              <a:rPr lang="en-US" sz="1600" dirty="0"/>
+              <a:t>Name and storage settings for the table</a:t>
+            </a:r>
+          </a:p>
+          <a:p>
+            <a:pPr marL="571500" lvl="1" indent="-228600" defTabSz="914367">
+              <a:spcBef>
+                <a:spcPts val="0"/>
+              </a:spcBef>
+              <a:spcAft>
+                <a:spcPts val="600"/>
+              </a:spcAft>
+              <a:buFont typeface="Segoe UI" panose="020B0502040204020203" pitchFamily="34" charset="0"/>
+              <a:buChar char="–"/>
+              <a:tabLst>
+                <a:tab pos="508000" algn="l"/>
+              </a:tabLst>
+            </a:pPr>
+            <a:r>
+              <a:rPr lang="en-US" sz="1600" dirty="0"/>
+              <a:t>Names, key usage, nullability, and data types for each column</a:t>
+            </a:r>
+          </a:p>
+          <a:p>
+            <a:pPr marL="571500" lvl="1" indent="-228600" defTabSz="914367">
+              <a:spcBef>
+                <a:spcPts val="0"/>
+              </a:spcBef>
+              <a:spcAft>
+                <a:spcPts val="1200"/>
+              </a:spcAft>
+              <a:buFont typeface="Segoe UI" panose="020B0502040204020203" pitchFamily="34" charset="0"/>
+              <a:buChar char="–"/>
+              <a:tabLst>
+                <a:tab pos="508000" algn="l"/>
+              </a:tabLst>
+            </a:pPr>
+            <a:r>
+              <a:rPr lang="en-US" sz="1600" dirty="0"/>
+              <a:t>Relationships between </a:t>
+            </a:r>
+            <a:r>
+              <a:rPr lang="en-US" sz="1600"/>
+              <a:t>key columns across </a:t>
+            </a:r>
+            <a:r>
+              <a:rPr lang="en-US" sz="1600" dirty="0"/>
+              <a:t>tables</a:t>
+            </a:r>
+          </a:p>
+        </p:txBody>
+      </p:sp>
+      <p:sp>
+        <p:nvSpPr>
+          <p:cNvPr id="5" name="Rectangle 4">
+            <a:extLst>
+              <a:ext uri="{FF2B5EF4-FFF2-40B4-BE49-F238E27FC236}">
+                <a16:creationId xmlns:a16="http://schemas.microsoft.com/office/drawing/2014/main" id="{40A75267-389B-1AD2-DE96-6D53A77F8A4B}"/>
+              </a:ext>
+              <a:ext uri="{C183D7F6-B498-43B3-948B-1728B52AA6E4}">
+                <adec:decorative xmlns:adec="http://schemas.microsoft.com/office/drawing/2017/decorative" val="1"/>
+              </a:ext>
+            </a:extLst>
+          </p:cNvPr>
+          <p:cNvSpPr>
+            <a:spLocks/>
+          </p:cNvSpPr>
+          <p:nvPr/>
+        </p:nvSpPr>
+        <p:spPr bwMode="auto">
+          <a:xfrm>
+            <a:off x="4064000" y="1581150"/>
+            <a:ext cx="7535862" cy="4430720"/>
+          </a:xfrm>
+          <a:prstGeom prst="rect">
+            <a:avLst/>
+          </a:prstGeom>
+          <a:solidFill>
+            <a:schemeClr val="bg1"/>
+          </a:solidFill>
+          <a:ln w="19050">
+            <a:solidFill>
+              <a:schemeClr val="accent4"/>
+            </a:solidFill>
+            <a:headEnd type="none" w="med" len="med"/>
+            <a:tailEnd type="none" w="med" len="med"/>
+          </a:ln>
+          <a:effectLst/>
+        </p:spPr>
+        <p:style>
+          <a:lnRef idx="1">
+            <a:schemeClr val="accent2"/>
+          </a:lnRef>
+          <a:fillRef idx="3">
+            <a:schemeClr val="accent2"/>
+          </a:fillRef>
+          <a:effectRef idx="2">
+            <a:schemeClr val="accent2"/>
+          </a:effectRef>
+          <a:fontRef idx="minor">
+            <a:schemeClr val="lt1"/>
+          </a:fontRef>
+        </p:style>
+        <p:txBody>
+          <a:bodyPr rot="0" spcFirstLastPara="0" vertOverflow="overflow" horzOverflow="overflow" vert="horz" wrap="square" lIns="182880" tIns="146304" rIns="182880" bIns="146304" numCol="1" spcCol="0" rtlCol="0" fromWordArt="0" anchor="t" anchorCtr="0" forceAA="0" compatLnSpc="1">
+            <a:prstTxWarp prst="textNoShape">
+              <a:avLst/>
+            </a:prstTxWarp>
+            <a:noAutofit/>
+          </a:bodyPr>
+          <a:lstStyle/>
+          <a:p>
+            <a:pPr algn="l" defTabSz="932472" fontAlgn="base">
+              <a:spcBef>
+                <a:spcPct val="0"/>
+              </a:spcBef>
+              <a:spcAft>
+                <a:spcPct val="0"/>
+              </a:spcAft>
+            </a:pPr>
+            <a:endParaRPr lang="en-IN" sz="2400" dirty="0" err="1">
+              <a:gradFill>
+                <a:gsLst>
+                  <a:gs pos="0">
+                    <a:srgbClr val="FFFFFF"/>
+                  </a:gs>
+                  <a:gs pos="100000">
+                    <a:srgbClr val="FFFFFF"/>
+                  </a:gs>
+                </a:gsLst>
+                <a:lin ang="5400000" scaled="0"/>
+              </a:gradFill>
+              <a:ea typeface="Segoe UI" pitchFamily="34" charset="0"/>
+              <a:cs typeface="Segoe UI" pitchFamily="34" charset="0"/>
+            </a:endParaRPr>
+          </a:p>
+        </p:txBody>
+      </p:sp>
+      <p:pic>
+        <p:nvPicPr>
+          <p:cNvPr id="4" name="Picture 2" descr="Screenshot of database designer in Azure Synapse Studio.">
+            <a:extLst>
+              <a:ext uri="{FF2B5EF4-FFF2-40B4-BE49-F238E27FC236}">
+                <a16:creationId xmlns:a16="http://schemas.microsoft.com/office/drawing/2014/main" id="{FE5A8DB1-7BF4-0875-9FD8-12F74945C879}"/>
+              </a:ext>
+            </a:extLst>
+          </p:cNvPr>
+          <p:cNvPicPr>
+            <a:picLocks noChangeAspect="1" noChangeArrowheads="1"/>
+          </p:cNvPicPr>
+          <p:nvPr/>
+        </p:nvPicPr>
+        <p:blipFill>
+          <a:blip r:embed="rId3">
+            <a:extLst>
+              <a:ext uri="{28A0092B-C50C-407E-A947-70E740481C1C}">
+                <a14:useLocalDpi xmlns:a14="http://schemas.microsoft.com/office/drawing/2010/main" val="0"/>
+              </a:ext>
+            </a:extLst>
+          </a:blip>
+          <a:srcRect/>
+          <a:stretch>
+            <a:fillRect/>
+          </a:stretch>
+        </p:blipFill>
+        <p:spPr bwMode="auto">
+          <a:xfrm>
+            <a:off x="5155086" y="1708397"/>
+            <a:ext cx="5353690" cy="4176226"/>
+          </a:xfrm>
+          <a:prstGeom prst="rect">
+            <a:avLst/>
+          </a:prstGeom>
+          <a:noFill/>
+          <a:extLst>
+            <a:ext uri="{909E8E84-426E-40DD-AFC4-6F175D3DCCD1}">
+              <a14:hiddenFill xmlns:a14="http://schemas.microsoft.com/office/drawing/2010/main">
+                <a:solidFill>
+                  <a:srgbClr val="FFFFFF"/>
+                </a:solidFill>
+              </a14:hiddenFill>
+            </a:ext>
+          </a:extLst>
+        </p:spPr>
+      </p:pic>
+    </p:spTree>
+    <p:extLst>
+      <p:ext uri="{BB962C8B-B14F-4D97-AF65-F5344CB8AC3E}">
+        <p14:creationId xmlns:p14="http://schemas.microsoft.com/office/powerpoint/2010/main" val="2443454337"/>
+      </p:ext>
+    </p:extLst>
+  </p:cSld>
+  <p:clrMapOvr>
+    <a:masterClrMapping/>
+  </p:clrMapOvr>
+  <p:transition>
+    <p:fade/>
+  </p:transition>
+</p:sld>
+</file>
+
+<file path=ppt/slides/slide7.xml><?xml version="1.0" encoding="utf-8"?>
+<p:sld xmlns:a="http://schemas.openxmlformats.org/drawingml/2006/main" xmlns:r="http://schemas.openxmlformats.org/officeDocument/2006/relationships" xmlns:p="http://schemas.openxmlformats.org/presentationml/2006/main">
+  <p:cSld>
+    <p:spTree>
+      <p:nvGrpSpPr>
+        <p:cNvPr id="1" name=""/>
+        <p:cNvGrpSpPr/>
+        <p:nvPr/>
+      </p:nvGrpSpPr>
+      <p:grpSpPr>
+        <a:xfrm>
+          <a:off x="0" y="0"/>
+          <a:ext cx="0" cy="0"/>
+          <a:chOff x="0" y="0"/>
+          <a:chExt cx="0" cy="0"/>
+        </a:xfrm>
+      </p:grpSpPr>
+      <p:sp>
+        <p:nvSpPr>
+          <p:cNvPr id="2" name="Title 1">
+            <a:extLst>
+              <a:ext uri="{FF2B5EF4-FFF2-40B4-BE49-F238E27FC236}">
+                <a16:creationId xmlns:a16="http://schemas.microsoft.com/office/drawing/2014/main" id="{AC3BB263-F93B-DDA7-8008-DC3B59DC7E47}"/>
+              </a:ext>
+            </a:extLst>
+          </p:cNvPr>
+          <p:cNvSpPr>
+            <a:spLocks noGrp="1"/>
+          </p:cNvSpPr>
+          <p:nvPr>
+            <p:ph type="title"/>
+          </p:nvPr>
+        </p:nvSpPr>
+        <p:spPr>
+          <a:xfrm>
+            <a:off x="588262" y="585216"/>
+            <a:ext cx="8193024" cy="369332"/>
+          </a:xfrm>
+        </p:spPr>
+        <p:txBody>
+          <a:bodyPr>
+            <a:normAutofit fontScale="90000"/>
+          </a:bodyPr>
+          <a:lstStyle/>
+          <a:p>
+            <a:r>
+              <a:rPr lang="en-US" dirty="0"/>
+              <a:t>Use a lake database</a:t>
+            </a:r>
+          </a:p>
+        </p:txBody>
+      </p:sp>
+      <p:sp>
+        <p:nvSpPr>
+          <p:cNvPr id="3" name="Rectangle 2">
+            <a:extLst>
+              <a:ext uri="{FF2B5EF4-FFF2-40B4-BE49-F238E27FC236}">
+                <a16:creationId xmlns:a16="http://schemas.microsoft.com/office/drawing/2014/main" id="{AB35A631-2B8A-3B39-04A9-51FC8CCF4A25}"/>
+              </a:ext>
+              <a:ext uri="{C183D7F6-B498-43B3-948B-1728B52AA6E4}">
+                <adec:decorative xmlns:adec="http://schemas.microsoft.com/office/drawing/2017/decorative" val="1"/>
+              </a:ext>
+            </a:extLst>
+          </p:cNvPr>
+          <p:cNvSpPr>
+            <a:spLocks/>
+          </p:cNvSpPr>
+          <p:nvPr/>
+        </p:nvSpPr>
+        <p:spPr bwMode="auto">
+          <a:xfrm>
+            <a:off x="588263" y="1581150"/>
+            <a:ext cx="11011598" cy="2266950"/>
+          </a:xfrm>
+          <a:prstGeom prst="rect">
+            <a:avLst/>
+          </a:prstGeom>
+          <a:solidFill>
+            <a:schemeClr val="bg1"/>
+          </a:solidFill>
+          <a:ln w="19050">
+            <a:solidFill>
+              <a:schemeClr val="accent4"/>
+            </a:solidFill>
+            <a:headEnd type="none" w="med" len="med"/>
+            <a:tailEnd type="none" w="med" len="med"/>
+          </a:ln>
+          <a:effectLst/>
+        </p:spPr>
+        <p:style>
+          <a:lnRef idx="1">
+            <a:schemeClr val="accent2"/>
+          </a:lnRef>
+          <a:fillRef idx="3">
+            <a:schemeClr val="accent2"/>
+          </a:fillRef>
+          <a:effectRef idx="2">
+            <a:schemeClr val="accent2"/>
+          </a:effectRef>
+          <a:fontRef idx="minor">
+            <a:schemeClr val="lt1"/>
+          </a:fontRef>
+        </p:style>
+        <p:txBody>
+          <a:bodyPr rot="0" spcFirstLastPara="0" vertOverflow="overflow" horzOverflow="overflow" vert="horz" wrap="square" lIns="182880" tIns="146304" rIns="182880" bIns="146304" numCol="1" spcCol="0" rtlCol="0" fromWordArt="0" anchor="t" anchorCtr="0" forceAA="0" compatLnSpc="1">
+            <a:prstTxWarp prst="textNoShape">
+              <a:avLst/>
+            </a:prstTxWarp>
+            <a:noAutofit/>
+          </a:bodyPr>
+          <a:lstStyle/>
+          <a:p>
+            <a:pPr algn="l" defTabSz="932472" fontAlgn="base">
+              <a:spcBef>
+                <a:spcPct val="0"/>
+              </a:spcBef>
+              <a:spcAft>
+                <a:spcPct val="0"/>
+              </a:spcAft>
+            </a:pPr>
+            <a:endParaRPr lang="en-IN" sz="2400" dirty="0" err="1">
+              <a:gradFill>
+                <a:gsLst>
+                  <a:gs pos="0">
+                    <a:srgbClr val="FFFFFF"/>
+                  </a:gs>
+                  <a:gs pos="100000">
+                    <a:srgbClr val="FFFFFF"/>
+                  </a:gs>
+                </a:gsLst>
+                <a:lin ang="5400000" scaled="0"/>
+              </a:gradFill>
+              <a:ea typeface="Segoe UI" pitchFamily="34" charset="0"/>
+              <a:cs typeface="Segoe UI" pitchFamily="34" charset="0"/>
+            </a:endParaRPr>
+          </a:p>
+        </p:txBody>
+      </p:sp>
+      <p:pic>
+        <p:nvPicPr>
+          <p:cNvPr id="6" name="Graphic 5" descr="SQL Pool">
+            <a:extLst>
+              <a:ext uri="{FF2B5EF4-FFF2-40B4-BE49-F238E27FC236}">
+                <a16:creationId xmlns:a16="http://schemas.microsoft.com/office/drawing/2014/main" id="{29437F04-5327-4906-C710-CA1577B75FCE}"/>
+              </a:ext>
+            </a:extLst>
+          </p:cNvPr>
+          <p:cNvPicPr>
+            <a:picLocks noChangeAspect="1"/>
+          </p:cNvPicPr>
+          <p:nvPr/>
+        </p:nvPicPr>
+        <p:blipFill>
+          <a:blip r:embed="rId3">
+            <a:extLst>
+              <a:ext uri="{96DAC541-7B7A-43D3-8B79-37D633B846F1}">
+                <asvg:svgBlip xmlns:asvg="http://schemas.microsoft.com/office/drawing/2016/SVG/main" r:embed="rId4"/>
+              </a:ext>
+            </a:extLst>
+          </a:blip>
+          <a:stretch>
+            <a:fillRect/>
+          </a:stretch>
+        </p:blipFill>
+        <p:spPr>
+          <a:xfrm>
+            <a:off x="1067091" y="2321072"/>
+            <a:ext cx="787110" cy="787108"/>
+          </a:xfrm>
+          <a:prstGeom prst="rect">
+            <a:avLst/>
+          </a:prstGeom>
+        </p:spPr>
+      </p:pic>
+      <p:sp>
+        <p:nvSpPr>
+          <p:cNvPr id="4" name="TextBox 3">
+            <a:extLst>
+              <a:ext uri="{FF2B5EF4-FFF2-40B4-BE49-F238E27FC236}">
+                <a16:creationId xmlns:a16="http://schemas.microsoft.com/office/drawing/2014/main" id="{0C516AB2-7625-6915-E58D-6754942693B9}"/>
+              </a:ext>
+            </a:extLst>
+          </p:cNvPr>
+          <p:cNvSpPr txBox="1">
+            <a:spLocks/>
+          </p:cNvSpPr>
+          <p:nvPr/>
+        </p:nvSpPr>
+        <p:spPr>
+          <a:xfrm>
+            <a:off x="2362200" y="1975961"/>
+            <a:ext cx="9030652" cy="1477328"/>
+          </a:xfrm>
+          <a:prstGeom prst="rect">
+            <a:avLst/>
+          </a:prstGeom>
+          <a:noFill/>
+        </p:spPr>
+        <p:txBody>
+          <a:bodyPr wrap="square" lIns="0" tIns="0" rIns="0" bIns="0" anchor="ctr">
+            <a:spAutoFit/>
+          </a:bodyPr>
+          <a:lstStyle>
+            <a:defPPr>
+              <a:defRPr lang="en-US"/>
+            </a:defPPr>
+            <a:lvl1pPr>
+              <a:defRPr sz="1400"/>
+            </a:lvl1pPr>
+          </a:lstStyle>
+          <a:p>
+            <a:r>
+              <a:rPr lang="en-US" sz="1600" dirty="0"/>
+              <a:t>USE RetailDB;</a:t>
+            </a:r>
+          </a:p>
+          <a:p>
+            <a:r>
+              <a:rPr lang="en-US" sz="1600" dirty="0"/>
+              <a:t>GO</a:t>
+            </a:r>
+          </a:p>
+          <a:p>
+            <a:endParaRPr lang="en-US" sz="1600" dirty="0"/>
+          </a:p>
+          <a:p>
+            <a:r>
+              <a:rPr lang="en-US" sz="1600" dirty="0"/>
+              <a:t>SELECT CustomerID, FirstName, LastName</a:t>
+            </a:r>
+          </a:p>
+          <a:p>
+            <a:r>
+              <a:rPr lang="en-US" sz="1600" dirty="0"/>
+              <a:t>FROM Customer</a:t>
+            </a:r>
+          </a:p>
+          <a:p>
+            <a:r>
+              <a:rPr lang="en-US" sz="1600" dirty="0"/>
+              <a:t>ORDER BY LastName;</a:t>
+            </a:r>
+          </a:p>
+        </p:txBody>
+      </p:sp>
+      <p:sp>
+        <p:nvSpPr>
+          <p:cNvPr id="8" name="Rectangle 7">
+            <a:extLst>
+              <a:ext uri="{FF2B5EF4-FFF2-40B4-BE49-F238E27FC236}">
+                <a16:creationId xmlns:a16="http://schemas.microsoft.com/office/drawing/2014/main" id="{6CF9388E-98ED-0F23-A23E-9A45EAC85861}"/>
+              </a:ext>
+              <a:ext uri="{C183D7F6-B498-43B3-948B-1728B52AA6E4}">
+                <adec:decorative xmlns:adec="http://schemas.microsoft.com/office/drawing/2017/decorative" val="1"/>
+              </a:ext>
+            </a:extLst>
+          </p:cNvPr>
+          <p:cNvSpPr>
+            <a:spLocks/>
+          </p:cNvSpPr>
+          <p:nvPr/>
+        </p:nvSpPr>
+        <p:spPr bwMode="auto">
+          <a:xfrm>
+            <a:off x="588263" y="4005834"/>
+            <a:ext cx="11011598" cy="2266950"/>
+          </a:xfrm>
+          <a:prstGeom prst="rect">
+            <a:avLst/>
+          </a:prstGeom>
+          <a:solidFill>
+            <a:schemeClr val="bg1"/>
+          </a:solidFill>
+          <a:ln w="19050">
+            <a:solidFill>
+              <a:schemeClr val="accent4"/>
+            </a:solidFill>
+            <a:headEnd type="none" w="med" len="med"/>
+            <a:tailEnd type="none" w="med" len="med"/>
+          </a:ln>
+          <a:effectLst/>
+        </p:spPr>
+        <p:style>
+          <a:lnRef idx="1">
+            <a:schemeClr val="accent2"/>
+          </a:lnRef>
+          <a:fillRef idx="3">
+            <a:schemeClr val="accent2"/>
+          </a:fillRef>
+          <a:effectRef idx="2">
+            <a:schemeClr val="accent2"/>
+          </a:effectRef>
+          <a:fontRef idx="minor">
+            <a:schemeClr val="lt1"/>
+          </a:fontRef>
+        </p:style>
+        <p:txBody>
+          <a:bodyPr rot="0" spcFirstLastPara="0" vertOverflow="overflow" horzOverflow="overflow" vert="horz" wrap="square" lIns="182880" tIns="146304" rIns="182880" bIns="146304" numCol="1" spcCol="0" rtlCol="0" fromWordArt="0" anchor="t" anchorCtr="0" forceAA="0" compatLnSpc="1">
+            <a:prstTxWarp prst="textNoShape">
+              <a:avLst/>
+            </a:prstTxWarp>
+            <a:noAutofit/>
+          </a:bodyPr>
+          <a:lstStyle/>
+          <a:p>
+            <a:pPr algn="l" defTabSz="932472" fontAlgn="base">
+              <a:spcBef>
+                <a:spcPct val="0"/>
+              </a:spcBef>
+              <a:spcAft>
+                <a:spcPct val="0"/>
+              </a:spcAft>
+            </a:pPr>
+            <a:endParaRPr lang="en-IN" sz="2400" dirty="0" err="1">
+              <a:gradFill>
+                <a:gsLst>
+                  <a:gs pos="0">
+                    <a:srgbClr val="FFFFFF"/>
+                  </a:gs>
+                  <a:gs pos="100000">
+                    <a:srgbClr val="FFFFFF"/>
+                  </a:gs>
+                </a:gsLst>
+                <a:lin ang="5400000" scaled="0"/>
+              </a:gradFill>
+              <a:ea typeface="Segoe UI" pitchFamily="34" charset="0"/>
+              <a:cs typeface="Segoe UI" pitchFamily="34" charset="0"/>
+            </a:endParaRPr>
+          </a:p>
+        </p:txBody>
+      </p:sp>
+      <p:pic>
+        <p:nvPicPr>
+          <p:cNvPr id="9" name="Picture 8" descr="Spark pool">
+            <a:extLst>
+              <a:ext uri="{FF2B5EF4-FFF2-40B4-BE49-F238E27FC236}">
+                <a16:creationId xmlns:a16="http://schemas.microsoft.com/office/drawing/2014/main" id="{A6546AA9-444A-0100-BD6F-EAA700603445}"/>
+              </a:ext>
+            </a:extLst>
+          </p:cNvPr>
+          <p:cNvPicPr>
+            <a:picLocks noChangeAspect="1"/>
+          </p:cNvPicPr>
+          <p:nvPr/>
+        </p:nvPicPr>
+        <p:blipFill rotWithShape="1">
+          <a:blip r:embed="rId5"/>
+          <a:srcRect l="8247" r="3698"/>
+          <a:stretch/>
+        </p:blipFill>
+        <p:spPr>
+          <a:xfrm>
+            <a:off x="887343" y="4677727"/>
+            <a:ext cx="1146604" cy="923166"/>
+          </a:xfrm>
+          <a:prstGeom prst="rect">
+            <a:avLst/>
+          </a:prstGeom>
+        </p:spPr>
+      </p:pic>
+      <p:sp>
+        <p:nvSpPr>
+          <p:cNvPr id="7" name="TextBox 6">
+            <a:extLst>
+              <a:ext uri="{FF2B5EF4-FFF2-40B4-BE49-F238E27FC236}">
+                <a16:creationId xmlns:a16="http://schemas.microsoft.com/office/drawing/2014/main" id="{BC7F24BB-4464-A71A-423B-ABB28C669B97}"/>
+              </a:ext>
+            </a:extLst>
+          </p:cNvPr>
+          <p:cNvSpPr txBox="1">
+            <a:spLocks/>
+          </p:cNvSpPr>
+          <p:nvPr/>
+        </p:nvSpPr>
+        <p:spPr>
+          <a:xfrm>
+            <a:off x="2362200" y="4523756"/>
+            <a:ext cx="9030652" cy="1231106"/>
+          </a:xfrm>
+          <a:prstGeom prst="rect">
+            <a:avLst/>
+          </a:prstGeom>
+          <a:noFill/>
+        </p:spPr>
+        <p:txBody>
+          <a:bodyPr wrap="square" lIns="0" tIns="0" rIns="0" bIns="0" anchor="ctr">
+            <a:spAutoFit/>
+          </a:bodyPr>
+          <a:lstStyle>
+            <a:defPPr>
+              <a:defRPr lang="en-US"/>
+            </a:defPPr>
+            <a:lvl1pPr>
+              <a:defRPr sz="1400"/>
+            </a:lvl1pPr>
+          </a:lstStyle>
+          <a:p>
+            <a:r>
+              <a:rPr lang="en-US" sz="1600" dirty="0"/>
+              <a:t>%%sql</a:t>
+            </a:r>
+          </a:p>
+          <a:p>
+            <a:endParaRPr lang="en-US" sz="1600" dirty="0"/>
+          </a:p>
+          <a:p>
+            <a:r>
+              <a:rPr lang="en-US" sz="1600" dirty="0"/>
+              <a:t>INSERT INTO ‘</a:t>
+            </a:r>
+            <a:r>
+              <a:rPr lang="en-US" sz="1600" dirty="0" err="1"/>
+              <a:t>RetailDB</a:t>
+            </a:r>
+            <a:r>
+              <a:rPr lang="en-US" sz="1600" dirty="0"/>
+              <a:t>’.’Customer’ VALUES (123, ‘John’, ‘Yang’)</a:t>
+            </a:r>
+          </a:p>
+          <a:p>
+            <a:endParaRPr lang="en-US" sz="1600" dirty="0"/>
+          </a:p>
+          <a:p>
+            <a:r>
+              <a:rPr lang="en-US" sz="1600" dirty="0"/>
+              <a:t>SELECT * FROM ‘</a:t>
+            </a:r>
+            <a:r>
+              <a:rPr lang="en-US" sz="1600" dirty="0" err="1"/>
+              <a:t>RetailDB</a:t>
+            </a:r>
+            <a:r>
+              <a:rPr lang="en-US" sz="1600" dirty="0"/>
+              <a:t>’.’Customer’ WHERE CustomerID = 123</a:t>
+            </a:r>
+          </a:p>
+        </p:txBody>
+      </p:sp>
+      <p:sp>
+        <p:nvSpPr>
+          <p:cNvPr id="5" name="Footer Placeholder 4">
+            <a:extLst>
+              <a:ext uri="{FF2B5EF4-FFF2-40B4-BE49-F238E27FC236}">
+                <a16:creationId xmlns:a16="http://schemas.microsoft.com/office/drawing/2014/main" id="{E48F29DE-697F-59E6-C517-9BE9F658C612}"/>
+              </a:ext>
+            </a:extLst>
+          </p:cNvPr>
+          <p:cNvSpPr>
+            <a:spLocks noGrp="1"/>
+          </p:cNvSpPr>
+          <p:nvPr>
+            <p:ph type="ftr" sz="quarter" idx="3"/>
+          </p:nvPr>
+        </p:nvSpPr>
+        <p:spPr/>
+        <p:txBody>
+          <a:bodyPr/>
+          <a:lstStyle/>
+          <a:p>
+            <a:pPr defTabSz="914367">
+              <a:defRPr/>
+            </a:pPr>
+            <a:r>
+              <a:rPr lang="en-US">
+                <a:solidFill>
+                  <a:srgbClr val="000000"/>
+                </a:solidFill>
+              </a:rPr>
+              <a:t>© Copyright Microsoft Corporation. All rights reserved.</a:t>
+            </a:r>
+            <a:endParaRPr lang="en-US" dirty="0">
+              <a:solidFill>
+                <a:srgbClr val="000000"/>
+              </a:solidFill>
+            </a:endParaRPr>
+          </a:p>
+        </p:txBody>
+      </p:sp>
+    </p:spTree>
+    <p:extLst>
+      <p:ext uri="{BB962C8B-B14F-4D97-AF65-F5344CB8AC3E}">
+        <p14:creationId xmlns:p14="http://schemas.microsoft.com/office/powerpoint/2010/main" val="3667470392"/>
+      </p:ext>
+    </p:extLst>
+  </p:cSld>
+  <p:clrMapOvr>
+    <a:masterClrMapping/>
+  </p:clrMapOvr>
+  <p:transition>
+    <p:fade/>
+  </p:transition>
+</p:sld>
+</file>
+
+<file path=ppt/slides/slide8.xml><?xml version="1.0" encoding="utf-8"?>
+<p:sld xmlns:a="http://schemas.openxmlformats.org/drawingml/2006/main" xmlns:r="http://schemas.openxmlformats.org/officeDocument/2006/relationships" xmlns:p="http://schemas.openxmlformats.org/presentationml/2006/main">
+  <p:cSld>
+    <p:spTree>
+      <p:nvGrpSpPr>
+        <p:cNvPr id="1" name=""/>
+        <p:cNvGrpSpPr/>
+        <p:nvPr/>
+      </p:nvGrpSpPr>
+      <p:grpSpPr>
+        <a:xfrm>
+          <a:off x="0" y="0"/>
+          <a:ext cx="0" cy="0"/>
+          <a:chOff x="0" y="0"/>
+          <a:chExt cx="0" cy="0"/>
+        </a:xfrm>
+      </p:grpSpPr>
+      <p:sp>
+        <p:nvSpPr>
           <p:cNvPr id="2" name="Title 1">
             <a:extLst>
               <a:ext uri="{FF2B5EF4-FFF2-40B4-BE49-F238E27FC236}">
@@ -19594,7 +22674,7 @@
 </p:sld>
 </file>
 
-<file path=ppt/slides/slide5.xml><?xml version="1.0" encoding="utf-8"?>
+<file path=ppt/slides/slide9.xml><?xml version="1.0" encoding="utf-8"?>
 <p:sld xmlns:a="http://schemas.openxmlformats.org/drawingml/2006/main" xmlns:r="http://schemas.openxmlformats.org/officeDocument/2006/relationships" xmlns:p="http://schemas.openxmlformats.org/presentationml/2006/main" show="0">
   <p:cSld>
     <p:spTree>
@@ -19814,7 +22894,7 @@
                 <a:tabLst/>
                 <a:defRPr/>
               </a:pPr>
-              <a:t>5</a:t>
+              <a:t>9</a:t>
             </a:fld>
             <a:endParaRPr kumimoji="0" lang="en-US" sz="900" b="1" i="0" u="none" strike="noStrike" kern="1200" cap="none" spc="0" normalizeH="0" baseline="0" noProof="0" dirty="0">
               <a:ln>

--- a/05-Analyze data in a lake database.pptx
+++ b/05-Analyze data in a lake database.pptx
@@ -1067,7 +1067,7 @@
           <a:p>
             <a:fld id="{2B56BDA5-FBCC-43E1-957B-02AF36889AD5}" type="datetimeFigureOut">
               <a:rPr lang="en-US" smtClean="0"/>
-              <a:t>9/7/2024</a:t>
+              <a:t>9/9/2024</a:t>
             </a:fld>
             <a:endParaRPr lang="en-US" dirty="0"/>
           </a:p>
@@ -1244,7 +1244,7 @@
           <a:p>
             <a:fld id="{8F44CDF0-0D54-4AFE-B409-D6358A9BB9A1}" type="datetimeFigureOut">
               <a:rPr lang="en-US" smtClean="0"/>
-              <a:t>9/7/2024</a:t>
+              <a:t>9/9/2024</a:t>
             </a:fld>
             <a:endParaRPr lang="en-US" dirty="0"/>
           </a:p>
@@ -1808,17 +1808,7 @@
                 <a:effectLst/>
                 <a:latin typeface="Segoe UI" panose="020B0502040204020203" pitchFamily="34" charset="0"/>
               </a:rPr>
-              <a:t> ID) authentication on the data lake </a:t>
-            </a:r>
-            <a:r>
-              <a:rPr lang="en-IE" b="0" i="0">
-                <a:solidFill>
-                  <a:srgbClr val="171717"/>
-                </a:solidFill>
-                <a:effectLst/>
-                <a:latin typeface="Segoe UI" panose="020B0502040204020203" pitchFamily="34" charset="0"/>
-              </a:rPr>
-              <a:t>and Dataverse.</a:t>
+              <a:t> ID) authentication on the data lake and Dataverse.</a:t>
             </a:r>
             <a:endParaRPr lang="en-US" b="0" i="0" dirty="0">
               <a:solidFill>
@@ -20896,7 +20886,7 @@
         <p:spPr>
           <a:xfrm>
             <a:off x="129096" y="2156490"/>
-            <a:ext cx="5525880" cy="3416320"/>
+            <a:ext cx="5525880" cy="3693319"/>
           </a:xfrm>
           <a:prstGeom prst="rect">
             <a:avLst/>
@@ -20924,6 +20914,12 @@
               </a:rPr>
               <a:t> where you can define tables on top of lake data using Apache Spark notebooks, database templates, or Microsoft Dataverse (previously Common Data Service). These tables will be available for querying using T-SQL (Transact-SQL) language using the serverless SQL pool.</a:t>
             </a:r>
+          </a:p>
+          <a:p>
+            <a:pPr algn="l"/>
+            <a:endParaRPr lang="en-US" b="1" dirty="0">
+              <a:latin typeface="Segoe UI" panose="020B0502040204020203" pitchFamily="34" charset="0"/>
+            </a:endParaRPr>
           </a:p>
           <a:p>
             <a:pPr algn="l"/>
